--- a/ゲーム科2年/01_後期/ゲームAI概論/04_ここまでの課題.pptx
+++ b/ゲーム科2年/01_後期/ゲームAI概論/04_ここまでの課題.pptx
@@ -6,15 +6,6 @@
   </p:sldMasterIdLst>
   <p:sldIdLst>
     <p:sldId id="257" r:id="rId2"/>
-    <p:sldId id="256" r:id="rId3"/>
-    <p:sldId id="258" r:id="rId4"/>
-    <p:sldId id="259" r:id="rId5"/>
-    <p:sldId id="260" r:id="rId6"/>
-    <p:sldId id="261" r:id="rId7"/>
-    <p:sldId id="262" r:id="rId8"/>
-    <p:sldId id="263" r:id="rId9"/>
-    <p:sldId id="264" r:id="rId10"/>
-    <p:sldId id="265" r:id="rId11"/>
   </p:sldIdLst>
   <p:sldSz cx="12192000" cy="6858000"/>
   <p:notesSz cx="6858000" cy="9144000"/>
@@ -268,7 +259,7 @@
           <a:p>
             <a:fld id="{E9CC885B-4903-4D54-9A93-00025F12DED9}" type="datetimeFigureOut">
               <a:rPr kumimoji="1" lang="ja-JP" altLang="en-US" smtClean="0"/>
-              <a:t>2025/2/7</a:t>
+              <a:t>2025/7/9</a:t>
             </a:fld>
             <a:endParaRPr kumimoji="1" lang="ja-JP" altLang="en-US"/>
           </a:p>
@@ -498,7 +489,7 @@
           <a:p>
             <a:fld id="{E9CC885B-4903-4D54-9A93-00025F12DED9}" type="datetimeFigureOut">
               <a:rPr kumimoji="1" lang="ja-JP" altLang="en-US" smtClean="0"/>
-              <a:t>2025/2/7</a:t>
+              <a:t>2025/7/9</a:t>
             </a:fld>
             <a:endParaRPr kumimoji="1" lang="ja-JP" altLang="en-US"/>
           </a:p>
@@ -738,7 +729,7 @@
           <a:p>
             <a:fld id="{E9CC885B-4903-4D54-9A93-00025F12DED9}" type="datetimeFigureOut">
               <a:rPr kumimoji="1" lang="ja-JP" altLang="en-US" smtClean="0"/>
-              <a:t>2025/2/7</a:t>
+              <a:t>2025/7/9</a:t>
             </a:fld>
             <a:endParaRPr kumimoji="1" lang="ja-JP" altLang="en-US"/>
           </a:p>
@@ -968,7 +959,7 @@
           <a:p>
             <a:fld id="{E9CC885B-4903-4D54-9A93-00025F12DED9}" type="datetimeFigureOut">
               <a:rPr kumimoji="1" lang="ja-JP" altLang="en-US" smtClean="0"/>
-              <a:t>2025/2/7</a:t>
+              <a:t>2025/7/9</a:t>
             </a:fld>
             <a:endParaRPr kumimoji="1" lang="ja-JP" altLang="en-US"/>
           </a:p>
@@ -1243,7 +1234,7 @@
           <a:p>
             <a:fld id="{E9CC885B-4903-4D54-9A93-00025F12DED9}" type="datetimeFigureOut">
               <a:rPr kumimoji="1" lang="ja-JP" altLang="en-US" smtClean="0"/>
-              <a:t>2025/2/7</a:t>
+              <a:t>2025/7/9</a:t>
             </a:fld>
             <a:endParaRPr kumimoji="1" lang="ja-JP" altLang="en-US"/>
           </a:p>
@@ -1572,7 +1563,7 @@
           <a:p>
             <a:fld id="{E9CC885B-4903-4D54-9A93-00025F12DED9}" type="datetimeFigureOut">
               <a:rPr kumimoji="1" lang="ja-JP" altLang="en-US" smtClean="0"/>
-              <a:t>2025/2/7</a:t>
+              <a:t>2025/7/9</a:t>
             </a:fld>
             <a:endParaRPr kumimoji="1" lang="ja-JP" altLang="en-US"/>
           </a:p>
@@ -2048,7 +2039,7 @@
           <a:p>
             <a:fld id="{E9CC885B-4903-4D54-9A93-00025F12DED9}" type="datetimeFigureOut">
               <a:rPr kumimoji="1" lang="ja-JP" altLang="en-US" smtClean="0"/>
-              <a:t>2025/2/7</a:t>
+              <a:t>2025/7/9</a:t>
             </a:fld>
             <a:endParaRPr kumimoji="1" lang="ja-JP" altLang="en-US"/>
           </a:p>
@@ -2189,7 +2180,7 @@
           <a:p>
             <a:fld id="{E9CC885B-4903-4D54-9A93-00025F12DED9}" type="datetimeFigureOut">
               <a:rPr kumimoji="1" lang="ja-JP" altLang="en-US" smtClean="0"/>
-              <a:t>2025/2/7</a:t>
+              <a:t>2025/7/9</a:t>
             </a:fld>
             <a:endParaRPr kumimoji="1" lang="ja-JP" altLang="en-US"/>
           </a:p>
@@ -2302,7 +2293,7 @@
           <a:p>
             <a:fld id="{E9CC885B-4903-4D54-9A93-00025F12DED9}" type="datetimeFigureOut">
               <a:rPr kumimoji="1" lang="ja-JP" altLang="en-US" smtClean="0"/>
-              <a:t>2025/2/7</a:t>
+              <a:t>2025/7/9</a:t>
             </a:fld>
             <a:endParaRPr kumimoji="1" lang="ja-JP" altLang="en-US"/>
           </a:p>
@@ -2645,7 +2636,7 @@
           <a:p>
             <a:fld id="{E9CC885B-4903-4D54-9A93-00025F12DED9}" type="datetimeFigureOut">
               <a:rPr kumimoji="1" lang="ja-JP" altLang="en-US" smtClean="0"/>
-              <a:t>2025/2/7</a:t>
+              <a:t>2025/7/9</a:t>
             </a:fld>
             <a:endParaRPr kumimoji="1" lang="ja-JP" altLang="en-US"/>
           </a:p>
@@ -2933,7 +2924,7 @@
           <a:p>
             <a:fld id="{E9CC885B-4903-4D54-9A93-00025F12DED9}" type="datetimeFigureOut">
               <a:rPr kumimoji="1" lang="ja-JP" altLang="en-US" smtClean="0"/>
-              <a:t>2025/2/7</a:t>
+              <a:t>2025/7/9</a:t>
             </a:fld>
             <a:endParaRPr kumimoji="1" lang="ja-JP" altLang="en-US"/>
           </a:p>
@@ -3206,7 +3197,7 @@
           <a:p>
             <a:fld id="{E9CC885B-4903-4D54-9A93-00025F12DED9}" type="datetimeFigureOut">
               <a:rPr kumimoji="1" lang="ja-JP" altLang="en-US" smtClean="0"/>
-              <a:t>2025/2/7</a:t>
+              <a:t>2025/7/9</a:t>
             </a:fld>
             <a:endParaRPr kumimoji="1" lang="ja-JP" altLang="en-US"/>
           </a:p>
@@ -3638,7 +3629,7 @@
         <p:spPr>
           <a:xfrm>
             <a:off x="567542" y="491954"/>
-            <a:ext cx="3199915" cy="584775"/>
+            <a:ext cx="3057247" cy="584775"/>
           </a:xfrm>
           <a:prstGeom prst="rect">
             <a:avLst/>
@@ -3652,12 +3643,8 @@
           <a:lstStyle/>
           <a:p>
             <a:r>
-              <a:rPr kumimoji="1" lang="en-US" altLang="ja-JP" sz="3200" b="1" u="sng" dirty="0"/>
-              <a:t>3D</a:t>
-            </a:r>
-            <a:r>
               <a:rPr kumimoji="1" lang="ja-JP" altLang="en-US" sz="3200" b="1" u="sng" dirty="0"/>
-              <a:t>モデルの作成</a:t>
+              <a:t>ここまでの課題</a:t>
             </a:r>
             <a:endParaRPr kumimoji="1" lang="en-US" altLang="ja-JP" sz="3200" b="1" u="sng" dirty="0"/>
           </a:p>
@@ -3678,7 +3665,7 @@
         <p:spPr>
           <a:xfrm>
             <a:off x="567542" y="1216429"/>
-            <a:ext cx="10825399" cy="3046988"/>
+            <a:ext cx="9725739" cy="2677656"/>
           </a:xfrm>
           <a:prstGeom prst="rect">
             <a:avLst/>
@@ -3692,63 +3679,63 @@
           <a:lstStyle/>
           <a:p>
             <a:r>
-              <a:rPr kumimoji="1" lang="en-US" altLang="ja-JP" sz="2400" dirty="0"/>
-              <a:t>3D</a:t>
-            </a:r>
-            <a:r>
               <a:rPr kumimoji="1" lang="ja-JP" altLang="en-US" sz="2400" dirty="0"/>
-              <a:t>モデルをゲームで使用する際は、</a:t>
-            </a:r>
-            <a:r>
-              <a:rPr kumimoji="1" lang="en-US" altLang="ja-JP" sz="2400" b="1" dirty="0">
+              <a:t>近くにアイテムが落ちていたら拾いに行くように、</a:t>
+            </a:r>
+            <a:endParaRPr kumimoji="1" lang="en-US" altLang="ja-JP" sz="2400" dirty="0"/>
+          </a:p>
+          <a:p>
+            <a:r>
+              <a:rPr lang="en-US" altLang="ja-JP" sz="2400" b="1" dirty="0" err="1">
                 <a:solidFill>
-                  <a:srgbClr val="FF0000"/>
+                  <a:srgbClr val="00B050"/>
                 </a:solidFill>
               </a:rPr>
-              <a:t>FBX</a:t>
-            </a:r>
-            <a:r>
-              <a:rPr kumimoji="1" lang="ja-JP" altLang="en-US" sz="2400" b="1" dirty="0">
+              <a:t>AIPlayCPU</a:t>
+            </a:r>
+            <a:r>
+              <a:rPr lang="ja-JP" altLang="en-US" sz="2400" b="1" dirty="0">
                 <a:solidFill>
-                  <a:srgbClr val="FF0000"/>
+                  <a:srgbClr val="00B050"/>
                 </a:solidFill>
               </a:rPr>
-              <a:t>形式</a:t>
-            </a:r>
-            <a:r>
-              <a:rPr kumimoji="1" lang="ja-JP" altLang="en-US" sz="2400" dirty="0"/>
-              <a:t>のモデルが一般的です。</a:t>
-            </a:r>
-            <a:endParaRPr kumimoji="1" lang="en-US" altLang="ja-JP" sz="2400" dirty="0"/>
-          </a:p>
-          <a:p>
+              <a:t>クラス</a:t>
+            </a:r>
             <a:r>
               <a:rPr lang="ja-JP" altLang="en-US" sz="2400" dirty="0"/>
-              <a:t>しかし</a:t>
-            </a:r>
-            <a:r>
-              <a:rPr lang="en-US" altLang="ja-JP" sz="2400" b="1" dirty="0" err="1">
-                <a:solidFill>
-                  <a:srgbClr val="FF0000"/>
-                </a:solidFill>
-              </a:rPr>
-              <a:t>DxLib</a:t>
-            </a:r>
+              <a:t>を改造しましょう。</a:t>
+            </a:r>
+            <a:endParaRPr lang="en-US" altLang="ja-JP" sz="2400" dirty="0"/>
+          </a:p>
+          <a:p>
             <a:r>
               <a:rPr lang="ja-JP" altLang="en-US" sz="2400" b="1" dirty="0">
                 <a:solidFill>
                   <a:srgbClr val="FF0000"/>
                 </a:solidFill>
               </a:rPr>
-              <a:t>は</a:t>
-            </a:r>
+              <a:t>アイテムがないときのみ、他プレイヤーに近づくようにしましょう。</a:t>
+            </a:r>
+            <a:endParaRPr lang="en-US" altLang="ja-JP" sz="2400" b="1" dirty="0">
+              <a:solidFill>
+                <a:srgbClr val="FF0000"/>
+              </a:solidFill>
+            </a:endParaRPr>
+          </a:p>
+          <a:p>
+            <a:endParaRPr lang="en-US" altLang="ja-JP" sz="2400" dirty="0"/>
+          </a:p>
+          <a:p>
+            <a:endParaRPr kumimoji="1" lang="en-US" altLang="ja-JP" sz="2400" dirty="0"/>
+          </a:p>
+          <a:p>
             <a:r>
               <a:rPr lang="en-US" altLang="ja-JP" sz="2400" b="1" dirty="0">
                 <a:solidFill>
                   <a:srgbClr val="FF0000"/>
                 </a:solidFill>
               </a:rPr>
-              <a:t>FBX</a:t>
+              <a:t>※</a:t>
             </a:r>
             <a:r>
               <a:rPr lang="ja-JP" altLang="en-US" sz="2400" b="1" dirty="0">
@@ -3756,7 +3743,7 @@
                   <a:srgbClr val="FF0000"/>
                 </a:solidFill>
               </a:rPr>
-              <a:t>ファイルをサポートしていません。</a:t>
+              <a:t>注意</a:t>
             </a:r>
             <a:endParaRPr lang="en-US" altLang="ja-JP" sz="2400" b="1" dirty="0">
               <a:solidFill>
@@ -3765,70 +3752,15 @@
             </a:endParaRPr>
           </a:p>
           <a:p>
-            <a:endParaRPr kumimoji="1" lang="en-US" altLang="ja-JP" sz="2400" dirty="0"/>
-          </a:p>
-          <a:p>
-            <a:r>
-              <a:rPr kumimoji="1" lang="en-US" altLang="ja-JP" sz="2400" dirty="0"/>
-              <a:t>3D</a:t>
-            </a:r>
-            <a:r>
-              <a:rPr kumimoji="1" lang="ja-JP" altLang="en-US" sz="2400" dirty="0"/>
-              <a:t>モデルを自作したときは、</a:t>
-            </a:r>
-            <a:r>
-              <a:rPr kumimoji="1" lang="en-US" altLang="ja-JP" sz="2400" dirty="0" err="1"/>
-              <a:t>DxLib</a:t>
-            </a:r>
-            <a:r>
-              <a:rPr kumimoji="1" lang="ja-JP" altLang="en-US" sz="2400" dirty="0"/>
-              <a:t>でも使用できるように、</a:t>
-            </a:r>
-            <a:endParaRPr kumimoji="1" lang="en-US" altLang="ja-JP" sz="2400" dirty="0"/>
-          </a:p>
-          <a:p>
+            <a:r>
+              <a:rPr lang="en-US" altLang="ja-JP" sz="2400" dirty="0" err="1"/>
+              <a:t>AIPlayCPU</a:t>
+            </a:r>
             <a:r>
               <a:rPr lang="ja-JP" altLang="en-US" sz="2400" dirty="0"/>
-              <a:t>ファイルを</a:t>
-            </a:r>
-            <a:r>
-              <a:rPr lang="ja-JP" altLang="en-US" sz="2400" b="1" dirty="0">
-                <a:solidFill>
-                  <a:srgbClr val="FF0000"/>
-                </a:solidFill>
-              </a:rPr>
-              <a:t>変換</a:t>
-            </a:r>
-            <a:r>
-              <a:rPr lang="ja-JP" altLang="en-US" sz="2400" dirty="0"/>
-              <a:t>していく必要があります。</a:t>
+              <a:t>以外には手を入れないこと</a:t>
             </a:r>
             <a:endParaRPr lang="en-US" altLang="ja-JP" sz="2400" dirty="0"/>
-          </a:p>
-          <a:p>
-            <a:endParaRPr kumimoji="1" lang="en-US" altLang="ja-JP" sz="2400" dirty="0"/>
-          </a:p>
-          <a:p>
-            <a:r>
-              <a:rPr lang="ja-JP" altLang="en-US" sz="2400" dirty="0"/>
-              <a:t>また、</a:t>
-            </a:r>
-            <a:r>
-              <a:rPr lang="en-US" altLang="ja-JP" sz="2400" dirty="0"/>
-              <a:t>Blender</a:t>
-            </a:r>
-            <a:r>
-              <a:rPr lang="ja-JP" altLang="en-US" sz="2400" dirty="0"/>
-              <a:t>で保存する際も専用の設定をいくつかしなければいけません。</a:t>
-            </a:r>
-            <a:endParaRPr kumimoji="1" lang="en-US" altLang="ja-JP" sz="2400" dirty="0"/>
-          </a:p>
-          <a:p>
-            <a:r>
-              <a:rPr lang="ja-JP" altLang="en-US" sz="2400" dirty="0"/>
-              <a:t>手順は多いですが何度もやって慣れていきましょう。</a:t>
-            </a:r>
-            <a:endParaRPr kumimoji="1" lang="en-US" altLang="ja-JP" sz="2400" dirty="0"/>
           </a:p>
         </p:txBody>
       </p:sp>
@@ -3836,2224 +3768,6 @@
     <p:extLst>
       <p:ext uri="{BB962C8B-B14F-4D97-AF65-F5344CB8AC3E}">
         <p14:creationId xmlns:p14="http://schemas.microsoft.com/office/powerpoint/2010/main" val="38792862"/>
-      </p:ext>
-    </p:extLst>
-  </p:cSld>
-  <p:clrMapOvr>
-    <a:masterClrMapping/>
-  </p:clrMapOvr>
-</p:sld>
-</file>
-
-<file path=ppt/slides/slide10.xml><?xml version="1.0" encoding="utf-8"?>
-<p:sld xmlns:a="http://schemas.openxmlformats.org/drawingml/2006/main" xmlns:r="http://schemas.openxmlformats.org/officeDocument/2006/relationships" xmlns:p="http://schemas.openxmlformats.org/presentationml/2006/main">
-  <p:cSld>
-    <p:spTree>
-      <p:nvGrpSpPr>
-        <p:cNvPr id="1" name=""/>
-        <p:cNvGrpSpPr/>
-        <p:nvPr/>
-      </p:nvGrpSpPr>
-      <p:grpSpPr>
-        <a:xfrm>
-          <a:off x="0" y="0"/>
-          <a:ext cx="0" cy="0"/>
-          <a:chOff x="0" y="0"/>
-          <a:chExt cx="0" cy="0"/>
-        </a:xfrm>
-      </p:grpSpPr>
-      <p:sp>
-        <p:nvSpPr>
-          <p:cNvPr id="4" name="テキスト ボックス 3">
-            <a:extLst>
-              <a:ext uri="{FF2B5EF4-FFF2-40B4-BE49-F238E27FC236}">
-                <a16:creationId xmlns:a16="http://schemas.microsoft.com/office/drawing/2014/main" id="{5A13BF46-B8C5-48AA-8308-C9ECFF431A18}"/>
-              </a:ext>
-            </a:extLst>
-          </p:cNvPr>
-          <p:cNvSpPr txBox="1"/>
-          <p:nvPr/>
-        </p:nvSpPr>
-        <p:spPr>
-          <a:xfrm>
-            <a:off x="567542" y="491954"/>
-            <a:ext cx="3199915" cy="584775"/>
-          </a:xfrm>
-          <a:prstGeom prst="rect">
-            <a:avLst/>
-          </a:prstGeom>
-          <a:noFill/>
-        </p:spPr>
-        <p:txBody>
-          <a:bodyPr wrap="none" rtlCol="0">
-            <a:spAutoFit/>
-          </a:bodyPr>
-          <a:lstStyle/>
-          <a:p>
-            <a:r>
-              <a:rPr kumimoji="1" lang="en-US" altLang="ja-JP" sz="3200" b="1" u="sng" dirty="0"/>
-              <a:t>3D</a:t>
-            </a:r>
-            <a:r>
-              <a:rPr kumimoji="1" lang="ja-JP" altLang="en-US" sz="3200" b="1" u="sng" dirty="0"/>
-              <a:t>モデルの作成</a:t>
-            </a:r>
-            <a:endParaRPr kumimoji="1" lang="en-US" altLang="ja-JP" sz="3200" b="1" u="sng" dirty="0"/>
-          </a:p>
-        </p:txBody>
-      </p:sp>
-      <p:sp>
-        <p:nvSpPr>
-          <p:cNvPr id="6" name="テキスト ボックス 5">
-            <a:extLst>
-              <a:ext uri="{FF2B5EF4-FFF2-40B4-BE49-F238E27FC236}">
-                <a16:creationId xmlns:a16="http://schemas.microsoft.com/office/drawing/2014/main" id="{55830AD6-028B-4C4E-80BF-B70DFC1C3A46}"/>
-              </a:ext>
-            </a:extLst>
-          </p:cNvPr>
-          <p:cNvSpPr txBox="1"/>
-          <p:nvPr/>
-        </p:nvSpPr>
-        <p:spPr>
-          <a:xfrm>
-            <a:off x="567542" y="1216429"/>
-            <a:ext cx="8704627" cy="1200329"/>
-          </a:xfrm>
-          <a:prstGeom prst="rect">
-            <a:avLst/>
-          </a:prstGeom>
-          <a:noFill/>
-        </p:spPr>
-        <p:txBody>
-          <a:bodyPr wrap="none" rtlCol="0">
-            <a:spAutoFit/>
-          </a:bodyPr>
-          <a:lstStyle/>
-          <a:p>
-            <a:r>
-              <a:rPr kumimoji="1" lang="ja-JP" altLang="en-US" sz="2400" b="1" dirty="0">
-                <a:solidFill>
-                  <a:srgbClr val="FF0000"/>
-                </a:solidFill>
-              </a:rPr>
-              <a:t>ゲームに必要なのは</a:t>
-            </a:r>
-            <a:r>
-              <a:rPr kumimoji="1" lang="en-US" altLang="ja-JP" sz="2400" b="1" dirty="0">
-                <a:solidFill>
-                  <a:srgbClr val="FF0000"/>
-                </a:solidFill>
-              </a:rPr>
-              <a:t>X</a:t>
-            </a:r>
-            <a:r>
-              <a:rPr kumimoji="1" lang="ja-JP" altLang="en-US" sz="2400" b="1" dirty="0">
-                <a:solidFill>
-                  <a:srgbClr val="FF0000"/>
-                </a:solidFill>
-              </a:rPr>
-              <a:t>ファイルとテクスチャ画像</a:t>
-            </a:r>
-            <a:r>
-              <a:rPr kumimoji="1" lang="ja-JP" altLang="en-US" sz="2400" dirty="0"/>
-              <a:t>になります。</a:t>
-            </a:r>
-            <a:endParaRPr kumimoji="1" lang="en-US" altLang="ja-JP" sz="2400" dirty="0"/>
-          </a:p>
-          <a:p>
-            <a:r>
-              <a:rPr lang="ja-JP" altLang="en-US" sz="2400" dirty="0"/>
-              <a:t>それらを同じ場所に保存しておきましょう。</a:t>
-            </a:r>
-            <a:endParaRPr lang="en-US" altLang="ja-JP" sz="2400" dirty="0"/>
-          </a:p>
-          <a:p>
-            <a:r>
-              <a:rPr kumimoji="1" lang="ja-JP" altLang="en-US" sz="2400" dirty="0"/>
-              <a:t>（今回は</a:t>
-            </a:r>
-            <a:r>
-              <a:rPr kumimoji="1" lang="en-US" altLang="ja-JP" sz="2400" b="1" dirty="0">
-                <a:solidFill>
-                  <a:srgbClr val="FF0000"/>
-                </a:solidFill>
-              </a:rPr>
-              <a:t>Project</a:t>
-            </a:r>
-            <a:r>
-              <a:rPr kumimoji="1" lang="ja-JP" altLang="en-US" sz="2400" b="1" dirty="0">
-                <a:solidFill>
-                  <a:srgbClr val="FF0000"/>
-                </a:solidFill>
-              </a:rPr>
-              <a:t>　＞　</a:t>
-            </a:r>
-            <a:r>
-              <a:rPr kumimoji="1" lang="en-US" altLang="ja-JP" sz="2400" b="1" dirty="0">
-                <a:solidFill>
-                  <a:srgbClr val="FF0000"/>
-                </a:solidFill>
-              </a:rPr>
-              <a:t>Resource</a:t>
-            </a:r>
-            <a:r>
-              <a:rPr kumimoji="1" lang="ja-JP" altLang="en-US" sz="2400" b="1" dirty="0">
-                <a:solidFill>
-                  <a:srgbClr val="FF0000"/>
-                </a:solidFill>
-              </a:rPr>
-              <a:t>　＞　</a:t>
-            </a:r>
-            <a:r>
-              <a:rPr kumimoji="1" lang="en-US" altLang="ja-JP" sz="2400" b="1" dirty="0">
-                <a:solidFill>
-                  <a:srgbClr val="FF0000"/>
-                </a:solidFill>
-              </a:rPr>
-              <a:t>Player</a:t>
-            </a:r>
-            <a:r>
-              <a:rPr kumimoji="1" lang="ja-JP" altLang="en-US" sz="2400" dirty="0"/>
-              <a:t>に保存）</a:t>
-            </a:r>
-            <a:endParaRPr kumimoji="1" lang="en-US" altLang="ja-JP" sz="2400" dirty="0"/>
-          </a:p>
-        </p:txBody>
-      </p:sp>
-      <p:pic>
-        <p:nvPicPr>
-          <p:cNvPr id="3" name="図 2">
-            <a:extLst>
-              <a:ext uri="{FF2B5EF4-FFF2-40B4-BE49-F238E27FC236}">
-                <a16:creationId xmlns:a16="http://schemas.microsoft.com/office/drawing/2014/main" id="{1D457DD6-0334-471F-9AFA-449A1E743ABA}"/>
-              </a:ext>
-            </a:extLst>
-          </p:cNvPr>
-          <p:cNvPicPr>
-            <a:picLocks noChangeAspect="1"/>
-          </p:cNvPicPr>
-          <p:nvPr/>
-        </p:nvPicPr>
-        <p:blipFill>
-          <a:blip r:embed="rId2">
-            <a:extLst>
-              <a:ext uri="{28A0092B-C50C-407E-A947-70E740481C1C}">
-                <a14:useLocalDpi xmlns:a14="http://schemas.microsoft.com/office/drawing/2010/main" val="0"/>
-              </a:ext>
-            </a:extLst>
-          </a:blip>
-          <a:stretch>
-            <a:fillRect/>
-          </a:stretch>
-        </p:blipFill>
-        <p:spPr>
-          <a:xfrm>
-            <a:off x="567542" y="2556458"/>
-            <a:ext cx="6210035" cy="3085113"/>
-          </a:xfrm>
-          <a:prstGeom prst="rect">
-            <a:avLst/>
-          </a:prstGeom>
-        </p:spPr>
-      </p:pic>
-    </p:spTree>
-    <p:extLst>
-      <p:ext uri="{BB962C8B-B14F-4D97-AF65-F5344CB8AC3E}">
-        <p14:creationId xmlns:p14="http://schemas.microsoft.com/office/powerpoint/2010/main" val="2040065384"/>
-      </p:ext>
-    </p:extLst>
-  </p:cSld>
-  <p:clrMapOvr>
-    <a:masterClrMapping/>
-  </p:clrMapOvr>
-</p:sld>
-</file>
-
-<file path=ppt/slides/slide2.xml><?xml version="1.0" encoding="utf-8"?>
-<p:sld xmlns:a="http://schemas.openxmlformats.org/drawingml/2006/main" xmlns:r="http://schemas.openxmlformats.org/officeDocument/2006/relationships" xmlns:p="http://schemas.openxmlformats.org/presentationml/2006/main">
-  <p:cSld>
-    <p:spTree>
-      <p:nvGrpSpPr>
-        <p:cNvPr id="1" name=""/>
-        <p:cNvGrpSpPr/>
-        <p:nvPr/>
-      </p:nvGrpSpPr>
-      <p:grpSpPr>
-        <a:xfrm>
-          <a:off x="0" y="0"/>
-          <a:ext cx="0" cy="0"/>
-          <a:chOff x="0" y="0"/>
-          <a:chExt cx="0" cy="0"/>
-        </a:xfrm>
-      </p:grpSpPr>
-      <p:sp>
-        <p:nvSpPr>
-          <p:cNvPr id="4" name="テキスト ボックス 3">
-            <a:extLst>
-              <a:ext uri="{FF2B5EF4-FFF2-40B4-BE49-F238E27FC236}">
-                <a16:creationId xmlns:a16="http://schemas.microsoft.com/office/drawing/2014/main" id="{5A13BF46-B8C5-48AA-8308-C9ECFF431A18}"/>
-              </a:ext>
-            </a:extLst>
-          </p:cNvPr>
-          <p:cNvSpPr txBox="1"/>
-          <p:nvPr/>
-        </p:nvSpPr>
-        <p:spPr>
-          <a:xfrm>
-            <a:off x="567542" y="491954"/>
-            <a:ext cx="3199915" cy="584775"/>
-          </a:xfrm>
-          <a:prstGeom prst="rect">
-            <a:avLst/>
-          </a:prstGeom>
-          <a:noFill/>
-        </p:spPr>
-        <p:txBody>
-          <a:bodyPr wrap="none" rtlCol="0">
-            <a:spAutoFit/>
-          </a:bodyPr>
-          <a:lstStyle/>
-          <a:p>
-            <a:r>
-              <a:rPr kumimoji="1" lang="en-US" altLang="ja-JP" sz="3200" b="1" u="sng" dirty="0"/>
-              <a:t>3D</a:t>
-            </a:r>
-            <a:r>
-              <a:rPr kumimoji="1" lang="ja-JP" altLang="en-US" sz="3200" b="1" u="sng" dirty="0"/>
-              <a:t>モデルの作成</a:t>
-            </a:r>
-            <a:endParaRPr kumimoji="1" lang="en-US" altLang="ja-JP" sz="3200" b="1" u="sng" dirty="0"/>
-          </a:p>
-        </p:txBody>
-      </p:sp>
-      <p:sp>
-        <p:nvSpPr>
-          <p:cNvPr id="6" name="テキスト ボックス 5">
-            <a:extLst>
-              <a:ext uri="{FF2B5EF4-FFF2-40B4-BE49-F238E27FC236}">
-                <a16:creationId xmlns:a16="http://schemas.microsoft.com/office/drawing/2014/main" id="{55830AD6-028B-4C4E-80BF-B70DFC1C3A46}"/>
-              </a:ext>
-            </a:extLst>
-          </p:cNvPr>
-          <p:cNvSpPr txBox="1"/>
-          <p:nvPr/>
-        </p:nvSpPr>
-        <p:spPr>
-          <a:xfrm>
-            <a:off x="567542" y="1216429"/>
-            <a:ext cx="6949338" cy="830997"/>
-          </a:xfrm>
-          <a:prstGeom prst="rect">
-            <a:avLst/>
-          </a:prstGeom>
-          <a:noFill/>
-        </p:spPr>
-        <p:txBody>
-          <a:bodyPr wrap="none" rtlCol="0">
-            <a:spAutoFit/>
-          </a:bodyPr>
-          <a:lstStyle/>
-          <a:p>
-            <a:r>
-              <a:rPr kumimoji="1" lang="ja-JP" altLang="en-US" sz="2400" dirty="0"/>
-              <a:t>まずは</a:t>
-            </a:r>
-            <a:r>
-              <a:rPr kumimoji="1" lang="en-US" altLang="ja-JP" sz="2400" dirty="0"/>
-              <a:t>Blender</a:t>
-            </a:r>
-            <a:r>
-              <a:rPr kumimoji="1" lang="ja-JP" altLang="en-US" sz="2400" dirty="0"/>
-              <a:t>を使って</a:t>
-            </a:r>
-            <a:r>
-              <a:rPr kumimoji="1" lang="en-US" altLang="ja-JP" sz="2400" dirty="0"/>
-              <a:t>FBX</a:t>
-            </a:r>
-            <a:r>
-              <a:rPr kumimoji="1" lang="ja-JP" altLang="en-US" sz="2400" dirty="0"/>
-              <a:t>形式で保存します。</a:t>
-            </a:r>
-            <a:endParaRPr kumimoji="1" lang="en-US" altLang="ja-JP" sz="2400" dirty="0"/>
-          </a:p>
-          <a:p>
-            <a:r>
-              <a:rPr lang="ja-JP" altLang="en-US" sz="2400" dirty="0"/>
-              <a:t>「</a:t>
-            </a:r>
-            <a:r>
-              <a:rPr lang="en-US" altLang="ja-JP" sz="2400" b="1" dirty="0">
-                <a:solidFill>
-                  <a:srgbClr val="FF0000"/>
-                </a:solidFill>
-              </a:rPr>
-              <a:t>File</a:t>
-            </a:r>
-            <a:r>
-              <a:rPr lang="ja-JP" altLang="en-US" sz="2400" b="1" dirty="0">
-                <a:solidFill>
-                  <a:srgbClr val="FF0000"/>
-                </a:solidFill>
-              </a:rPr>
-              <a:t>　＞　</a:t>
-            </a:r>
-            <a:r>
-              <a:rPr lang="en-US" altLang="ja-JP" sz="2400" b="1" dirty="0">
-                <a:solidFill>
-                  <a:srgbClr val="FF0000"/>
-                </a:solidFill>
-              </a:rPr>
-              <a:t>Export</a:t>
-            </a:r>
-            <a:r>
-              <a:rPr lang="ja-JP" altLang="en-US" sz="2400" b="1" dirty="0">
-                <a:solidFill>
-                  <a:srgbClr val="FF0000"/>
-                </a:solidFill>
-              </a:rPr>
-              <a:t>　＞　</a:t>
-            </a:r>
-            <a:r>
-              <a:rPr lang="en-US" altLang="ja-JP" sz="2400" b="1" dirty="0">
-                <a:solidFill>
-                  <a:srgbClr val="FF0000"/>
-                </a:solidFill>
-              </a:rPr>
-              <a:t>FBX</a:t>
-            </a:r>
-            <a:r>
-              <a:rPr lang="ja-JP" altLang="en-US" sz="2400" dirty="0"/>
-              <a:t>」を選択します。</a:t>
-            </a:r>
-            <a:endParaRPr kumimoji="1" lang="en-US" altLang="ja-JP" sz="2400" dirty="0"/>
-          </a:p>
-        </p:txBody>
-      </p:sp>
-      <p:pic>
-        <p:nvPicPr>
-          <p:cNvPr id="3" name="図 2">
-            <a:extLst>
-              <a:ext uri="{FF2B5EF4-FFF2-40B4-BE49-F238E27FC236}">
-                <a16:creationId xmlns:a16="http://schemas.microsoft.com/office/drawing/2014/main" id="{EF5BC26A-E6ED-43C7-B5F2-9514EE0858C1}"/>
-              </a:ext>
-            </a:extLst>
-          </p:cNvPr>
-          <p:cNvPicPr>
-            <a:picLocks noChangeAspect="1"/>
-          </p:cNvPicPr>
-          <p:nvPr/>
-        </p:nvPicPr>
-        <p:blipFill>
-          <a:blip r:embed="rId2">
-            <a:extLst>
-              <a:ext uri="{28A0092B-C50C-407E-A947-70E740481C1C}">
-                <a14:useLocalDpi xmlns:a14="http://schemas.microsoft.com/office/drawing/2010/main" val="0"/>
-              </a:ext>
-            </a:extLst>
-          </a:blip>
-          <a:stretch>
-            <a:fillRect/>
-          </a:stretch>
-        </p:blipFill>
-        <p:spPr>
-          <a:xfrm>
-            <a:off x="567543" y="2187127"/>
-            <a:ext cx="4526664" cy="4315274"/>
-          </a:xfrm>
-          <a:prstGeom prst="rect">
-            <a:avLst/>
-          </a:prstGeom>
-        </p:spPr>
-      </p:pic>
-      <p:sp>
-        <p:nvSpPr>
-          <p:cNvPr id="5" name="矢印: 右 4">
-            <a:extLst>
-              <a:ext uri="{FF2B5EF4-FFF2-40B4-BE49-F238E27FC236}">
-                <a16:creationId xmlns:a16="http://schemas.microsoft.com/office/drawing/2014/main" id="{D959E5D6-DBBC-4B71-99ED-D0E8FC408370}"/>
-              </a:ext>
-            </a:extLst>
-          </p:cNvPr>
-          <p:cNvSpPr/>
-          <p:nvPr/>
-        </p:nvSpPr>
-        <p:spPr>
-          <a:xfrm rot="13679340">
-            <a:off x="2879197" y="5976592"/>
-            <a:ext cx="817913" cy="711200"/>
-          </a:xfrm>
-          <a:prstGeom prst="rightArrow">
-            <a:avLst/>
-          </a:prstGeom>
-          <a:solidFill>
-            <a:srgbClr val="FF0000"/>
-          </a:solidFill>
-          <a:ln w="38100">
-            <a:solidFill>
-              <a:schemeClr val="tx1"/>
-            </a:solidFill>
-          </a:ln>
-        </p:spPr>
-        <p:style>
-          <a:lnRef idx="2">
-            <a:schemeClr val="accent1">
-              <a:shade val="50000"/>
-            </a:schemeClr>
-          </a:lnRef>
-          <a:fillRef idx="1">
-            <a:schemeClr val="accent1"/>
-          </a:fillRef>
-          <a:effectRef idx="0">
-            <a:schemeClr val="accent1"/>
-          </a:effectRef>
-          <a:fontRef idx="minor">
-            <a:schemeClr val="lt1"/>
-          </a:fontRef>
-        </p:style>
-        <p:txBody>
-          <a:bodyPr rtlCol="0" anchor="ctr"/>
-          <a:lstStyle/>
-          <a:p>
-            <a:pPr algn="ctr"/>
-            <a:endParaRPr kumimoji="1" lang="ja-JP" altLang="en-US"/>
-          </a:p>
-        </p:txBody>
-      </p:sp>
-    </p:spTree>
-    <p:extLst>
-      <p:ext uri="{BB962C8B-B14F-4D97-AF65-F5344CB8AC3E}">
-        <p14:creationId xmlns:p14="http://schemas.microsoft.com/office/powerpoint/2010/main" val="410028988"/>
-      </p:ext>
-    </p:extLst>
-  </p:cSld>
-  <p:clrMapOvr>
-    <a:masterClrMapping/>
-  </p:clrMapOvr>
-</p:sld>
-</file>
-
-<file path=ppt/slides/slide3.xml><?xml version="1.0" encoding="utf-8"?>
-<p:sld xmlns:a="http://schemas.openxmlformats.org/drawingml/2006/main" xmlns:r="http://schemas.openxmlformats.org/officeDocument/2006/relationships" xmlns:p="http://schemas.openxmlformats.org/presentationml/2006/main">
-  <p:cSld>
-    <p:spTree>
-      <p:nvGrpSpPr>
-        <p:cNvPr id="1" name=""/>
-        <p:cNvGrpSpPr/>
-        <p:nvPr/>
-      </p:nvGrpSpPr>
-      <p:grpSpPr>
-        <a:xfrm>
-          <a:off x="0" y="0"/>
-          <a:ext cx="0" cy="0"/>
-          <a:chOff x="0" y="0"/>
-          <a:chExt cx="0" cy="0"/>
-        </a:xfrm>
-      </p:grpSpPr>
-      <p:sp>
-        <p:nvSpPr>
-          <p:cNvPr id="4" name="テキスト ボックス 3">
-            <a:extLst>
-              <a:ext uri="{FF2B5EF4-FFF2-40B4-BE49-F238E27FC236}">
-                <a16:creationId xmlns:a16="http://schemas.microsoft.com/office/drawing/2014/main" id="{5A13BF46-B8C5-48AA-8308-C9ECFF431A18}"/>
-              </a:ext>
-            </a:extLst>
-          </p:cNvPr>
-          <p:cNvSpPr txBox="1"/>
-          <p:nvPr/>
-        </p:nvSpPr>
-        <p:spPr>
-          <a:xfrm>
-            <a:off x="567542" y="491954"/>
-            <a:ext cx="3199915" cy="584775"/>
-          </a:xfrm>
-          <a:prstGeom prst="rect">
-            <a:avLst/>
-          </a:prstGeom>
-          <a:noFill/>
-        </p:spPr>
-        <p:txBody>
-          <a:bodyPr wrap="none" rtlCol="0">
-            <a:spAutoFit/>
-          </a:bodyPr>
-          <a:lstStyle/>
-          <a:p>
-            <a:r>
-              <a:rPr kumimoji="1" lang="en-US" altLang="ja-JP" sz="3200" b="1" u="sng" dirty="0"/>
-              <a:t>3D</a:t>
-            </a:r>
-            <a:r>
-              <a:rPr kumimoji="1" lang="ja-JP" altLang="en-US" sz="3200" b="1" u="sng" dirty="0"/>
-              <a:t>モデルの作成</a:t>
-            </a:r>
-            <a:endParaRPr kumimoji="1" lang="en-US" altLang="ja-JP" sz="3200" b="1" u="sng" dirty="0"/>
-          </a:p>
-        </p:txBody>
-      </p:sp>
-      <p:sp>
-        <p:nvSpPr>
-          <p:cNvPr id="6" name="テキスト ボックス 5">
-            <a:extLst>
-              <a:ext uri="{FF2B5EF4-FFF2-40B4-BE49-F238E27FC236}">
-                <a16:creationId xmlns:a16="http://schemas.microsoft.com/office/drawing/2014/main" id="{55830AD6-028B-4C4E-80BF-B70DFC1C3A46}"/>
-              </a:ext>
-            </a:extLst>
-          </p:cNvPr>
-          <p:cNvSpPr txBox="1"/>
-          <p:nvPr/>
-        </p:nvSpPr>
-        <p:spPr>
-          <a:xfrm>
-            <a:off x="567542" y="1216429"/>
-            <a:ext cx="9174306" cy="830997"/>
-          </a:xfrm>
-          <a:prstGeom prst="rect">
-            <a:avLst/>
-          </a:prstGeom>
-          <a:noFill/>
-        </p:spPr>
-        <p:txBody>
-          <a:bodyPr wrap="none" rtlCol="0">
-            <a:spAutoFit/>
-          </a:bodyPr>
-          <a:lstStyle/>
-          <a:p>
-            <a:r>
-              <a:rPr kumimoji="1" lang="ja-JP" altLang="en-US" sz="2400" dirty="0"/>
-              <a:t>右側にあるメニューの</a:t>
-            </a:r>
-            <a:r>
-              <a:rPr lang="ja-JP" altLang="en-US" sz="2400" dirty="0"/>
-              <a:t>「</a:t>
-            </a:r>
-            <a:r>
-              <a:rPr lang="en-US" altLang="ja-JP" sz="2400" b="1" dirty="0">
-                <a:solidFill>
-                  <a:srgbClr val="FF0000"/>
-                </a:solidFill>
-              </a:rPr>
-              <a:t>Include</a:t>
-            </a:r>
-            <a:r>
-              <a:rPr lang="ja-JP" altLang="en-US" sz="2400" b="1" dirty="0">
-                <a:solidFill>
-                  <a:srgbClr val="FF0000"/>
-                </a:solidFill>
-              </a:rPr>
-              <a:t>　＞　</a:t>
-            </a:r>
-            <a:r>
-              <a:rPr lang="en-US" altLang="ja-JP" sz="2400" b="1" dirty="0" err="1">
-                <a:solidFill>
-                  <a:srgbClr val="FF0000"/>
-                </a:solidFill>
-              </a:rPr>
-              <a:t>ObjectType</a:t>
-            </a:r>
-            <a:r>
-              <a:rPr lang="ja-JP" altLang="en-US" sz="2400" dirty="0"/>
-              <a:t>」の設定を、</a:t>
-            </a:r>
-            <a:endParaRPr lang="en-US" altLang="ja-JP" sz="2400" dirty="0"/>
-          </a:p>
-          <a:p>
-            <a:r>
-              <a:rPr kumimoji="1" lang="en-US" altLang="ja-JP" sz="2400" b="1" dirty="0">
-                <a:solidFill>
-                  <a:srgbClr val="FF0000"/>
-                </a:solidFill>
-              </a:rPr>
-              <a:t>Armature</a:t>
-            </a:r>
-            <a:r>
-              <a:rPr kumimoji="1" lang="ja-JP" altLang="en-US" sz="2400" dirty="0"/>
-              <a:t>と</a:t>
-            </a:r>
-            <a:r>
-              <a:rPr kumimoji="1" lang="en-US" altLang="ja-JP" sz="2400" b="1" dirty="0">
-                <a:solidFill>
-                  <a:srgbClr val="FF0000"/>
-                </a:solidFill>
-              </a:rPr>
-              <a:t>Mesh</a:t>
-            </a:r>
-            <a:r>
-              <a:rPr kumimoji="1" lang="ja-JP" altLang="en-US" sz="2400" dirty="0"/>
-              <a:t>だけ選択されている状態にしましょう</a:t>
-            </a:r>
-            <a:r>
-              <a:rPr lang="ja-JP" altLang="en-US" sz="2400" dirty="0"/>
-              <a:t>。</a:t>
-            </a:r>
-            <a:endParaRPr kumimoji="1" lang="en-US" altLang="ja-JP" sz="2400" dirty="0"/>
-          </a:p>
-        </p:txBody>
-      </p:sp>
-      <p:pic>
-        <p:nvPicPr>
-          <p:cNvPr id="5" name="図 4">
-            <a:extLst>
-              <a:ext uri="{FF2B5EF4-FFF2-40B4-BE49-F238E27FC236}">
-                <a16:creationId xmlns:a16="http://schemas.microsoft.com/office/drawing/2014/main" id="{15852968-E080-488D-9F22-0F3E9135DE74}"/>
-              </a:ext>
-            </a:extLst>
-          </p:cNvPr>
-          <p:cNvPicPr>
-            <a:picLocks noChangeAspect="1"/>
-          </p:cNvPicPr>
-          <p:nvPr/>
-        </p:nvPicPr>
-        <p:blipFill>
-          <a:blip r:embed="rId2">
-            <a:extLst>
-              <a:ext uri="{28A0092B-C50C-407E-A947-70E740481C1C}">
-                <a14:useLocalDpi xmlns:a14="http://schemas.microsoft.com/office/drawing/2010/main" val="0"/>
-              </a:ext>
-            </a:extLst>
-          </a:blip>
-          <a:stretch>
-            <a:fillRect/>
-          </a:stretch>
-        </p:blipFill>
-        <p:spPr>
-          <a:xfrm>
-            <a:off x="567541" y="2556458"/>
-            <a:ext cx="3832807" cy="3971342"/>
-          </a:xfrm>
-          <a:prstGeom prst="rect">
-            <a:avLst/>
-          </a:prstGeom>
-        </p:spPr>
-      </p:pic>
-      <p:sp>
-        <p:nvSpPr>
-          <p:cNvPr id="7" name="テキスト ボックス 6">
-            <a:extLst>
-              <a:ext uri="{FF2B5EF4-FFF2-40B4-BE49-F238E27FC236}">
-                <a16:creationId xmlns:a16="http://schemas.microsoft.com/office/drawing/2014/main" id="{34DEF125-BAD3-4E9C-958E-2B42953AA485}"/>
-              </a:ext>
-            </a:extLst>
-          </p:cNvPr>
-          <p:cNvSpPr txBox="1"/>
-          <p:nvPr/>
-        </p:nvSpPr>
-        <p:spPr>
-          <a:xfrm>
-            <a:off x="4400348" y="5696803"/>
-            <a:ext cx="5468164" cy="830997"/>
-          </a:xfrm>
-          <a:prstGeom prst="rect">
-            <a:avLst/>
-          </a:prstGeom>
-          <a:noFill/>
-        </p:spPr>
-        <p:txBody>
-          <a:bodyPr wrap="none" rtlCol="0">
-            <a:spAutoFit/>
-          </a:bodyPr>
-          <a:lstStyle/>
-          <a:p>
-            <a:r>
-              <a:rPr kumimoji="1" lang="en-US" altLang="ja-JP" sz="2400" dirty="0"/>
-              <a:t>Shift</a:t>
-            </a:r>
-            <a:r>
-              <a:rPr kumimoji="1" lang="ja-JP" altLang="en-US" sz="2400" dirty="0"/>
-              <a:t>キーを押しながらクリックすると</a:t>
-            </a:r>
-            <a:endParaRPr kumimoji="1" lang="en-US" altLang="ja-JP" sz="2400" dirty="0"/>
-          </a:p>
-          <a:p>
-            <a:r>
-              <a:rPr kumimoji="1" lang="ja-JP" altLang="en-US" sz="2400" dirty="0"/>
-              <a:t>複数選択できます</a:t>
-            </a:r>
-            <a:endParaRPr kumimoji="1" lang="en-US" altLang="ja-JP" sz="2400" dirty="0"/>
-          </a:p>
-        </p:txBody>
-      </p:sp>
-    </p:spTree>
-    <p:extLst>
-      <p:ext uri="{BB962C8B-B14F-4D97-AF65-F5344CB8AC3E}">
-        <p14:creationId xmlns:p14="http://schemas.microsoft.com/office/powerpoint/2010/main" val="2175188753"/>
-      </p:ext>
-    </p:extLst>
-  </p:cSld>
-  <p:clrMapOvr>
-    <a:masterClrMapping/>
-  </p:clrMapOvr>
-</p:sld>
-</file>
-
-<file path=ppt/slides/slide4.xml><?xml version="1.0" encoding="utf-8"?>
-<p:sld xmlns:a="http://schemas.openxmlformats.org/drawingml/2006/main" xmlns:r="http://schemas.openxmlformats.org/officeDocument/2006/relationships" xmlns:p="http://schemas.openxmlformats.org/presentationml/2006/main">
-  <p:cSld>
-    <p:spTree>
-      <p:nvGrpSpPr>
-        <p:cNvPr id="1" name=""/>
-        <p:cNvGrpSpPr/>
-        <p:nvPr/>
-      </p:nvGrpSpPr>
-      <p:grpSpPr>
-        <a:xfrm>
-          <a:off x="0" y="0"/>
-          <a:ext cx="0" cy="0"/>
-          <a:chOff x="0" y="0"/>
-          <a:chExt cx="0" cy="0"/>
-        </a:xfrm>
-      </p:grpSpPr>
-      <p:sp>
-        <p:nvSpPr>
-          <p:cNvPr id="4" name="テキスト ボックス 3">
-            <a:extLst>
-              <a:ext uri="{FF2B5EF4-FFF2-40B4-BE49-F238E27FC236}">
-                <a16:creationId xmlns:a16="http://schemas.microsoft.com/office/drawing/2014/main" id="{5A13BF46-B8C5-48AA-8308-C9ECFF431A18}"/>
-              </a:ext>
-            </a:extLst>
-          </p:cNvPr>
-          <p:cNvSpPr txBox="1"/>
-          <p:nvPr/>
-        </p:nvSpPr>
-        <p:spPr>
-          <a:xfrm>
-            <a:off x="567542" y="491954"/>
-            <a:ext cx="3199915" cy="584775"/>
-          </a:xfrm>
-          <a:prstGeom prst="rect">
-            <a:avLst/>
-          </a:prstGeom>
-          <a:noFill/>
-        </p:spPr>
-        <p:txBody>
-          <a:bodyPr wrap="none" rtlCol="0">
-            <a:spAutoFit/>
-          </a:bodyPr>
-          <a:lstStyle/>
-          <a:p>
-            <a:r>
-              <a:rPr kumimoji="1" lang="en-US" altLang="ja-JP" sz="3200" b="1" u="sng" dirty="0"/>
-              <a:t>3D</a:t>
-            </a:r>
-            <a:r>
-              <a:rPr kumimoji="1" lang="ja-JP" altLang="en-US" sz="3200" b="1" u="sng" dirty="0"/>
-              <a:t>モデルの作成</a:t>
-            </a:r>
-            <a:endParaRPr kumimoji="1" lang="en-US" altLang="ja-JP" sz="3200" b="1" u="sng" dirty="0"/>
-          </a:p>
-        </p:txBody>
-      </p:sp>
-      <p:sp>
-        <p:nvSpPr>
-          <p:cNvPr id="6" name="テキスト ボックス 5">
-            <a:extLst>
-              <a:ext uri="{FF2B5EF4-FFF2-40B4-BE49-F238E27FC236}">
-                <a16:creationId xmlns:a16="http://schemas.microsoft.com/office/drawing/2014/main" id="{55830AD6-028B-4C4E-80BF-B70DFC1C3A46}"/>
-              </a:ext>
-            </a:extLst>
-          </p:cNvPr>
-          <p:cNvSpPr txBox="1"/>
-          <p:nvPr/>
-        </p:nvSpPr>
-        <p:spPr>
-          <a:xfrm>
-            <a:off x="567542" y="1216429"/>
-            <a:ext cx="9999853" cy="830997"/>
-          </a:xfrm>
-          <a:prstGeom prst="rect">
-            <a:avLst/>
-          </a:prstGeom>
-          <a:noFill/>
-        </p:spPr>
-        <p:txBody>
-          <a:bodyPr wrap="none" rtlCol="0">
-            <a:spAutoFit/>
-          </a:bodyPr>
-          <a:lstStyle/>
-          <a:p>
-            <a:r>
-              <a:rPr kumimoji="1" lang="ja-JP" altLang="en-US" sz="2400" dirty="0"/>
-              <a:t>右側にあるメニューの</a:t>
-            </a:r>
-            <a:r>
-              <a:rPr lang="ja-JP" altLang="en-US" sz="2400" dirty="0"/>
-              <a:t>「</a:t>
-            </a:r>
-            <a:r>
-              <a:rPr lang="en-US" altLang="ja-JP" sz="2400" b="1" dirty="0">
-                <a:solidFill>
-                  <a:srgbClr val="FF0000"/>
-                </a:solidFill>
-              </a:rPr>
-              <a:t>Transform</a:t>
-            </a:r>
-            <a:r>
-              <a:rPr lang="ja-JP" altLang="en-US" sz="2400" b="1" dirty="0">
-                <a:solidFill>
-                  <a:srgbClr val="FF0000"/>
-                </a:solidFill>
-              </a:rPr>
-              <a:t>　＞　</a:t>
-            </a:r>
-            <a:r>
-              <a:rPr lang="en-US" altLang="ja-JP" sz="2400" b="1" dirty="0" err="1">
-                <a:solidFill>
-                  <a:srgbClr val="FF0000"/>
-                </a:solidFill>
-              </a:rPr>
-              <a:t>ApplyScalings</a:t>
-            </a:r>
-            <a:r>
-              <a:rPr lang="ja-JP" altLang="en-US" sz="2400" dirty="0"/>
-              <a:t>」の設定を、</a:t>
-            </a:r>
-            <a:endParaRPr lang="en-US" altLang="ja-JP" sz="2400" dirty="0"/>
-          </a:p>
-          <a:p>
-            <a:r>
-              <a:rPr kumimoji="1" lang="ja-JP" altLang="en-US" sz="2400" b="1" dirty="0">
-                <a:solidFill>
-                  <a:srgbClr val="FF0000"/>
-                </a:solidFill>
-              </a:rPr>
-              <a:t>「</a:t>
-            </a:r>
-            <a:r>
-              <a:rPr kumimoji="1" lang="en-US" altLang="ja-JP" sz="2400" b="1" dirty="0">
-                <a:solidFill>
-                  <a:srgbClr val="FF0000"/>
-                </a:solidFill>
-              </a:rPr>
-              <a:t>FBX Units Scale</a:t>
-            </a:r>
-            <a:r>
-              <a:rPr kumimoji="1" lang="ja-JP" altLang="en-US" sz="2400" b="1" dirty="0">
-                <a:solidFill>
-                  <a:srgbClr val="FF0000"/>
-                </a:solidFill>
-              </a:rPr>
-              <a:t>」</a:t>
-            </a:r>
-            <a:r>
-              <a:rPr kumimoji="1" lang="ja-JP" altLang="en-US" sz="2400" dirty="0"/>
-              <a:t>に設定しましょう。</a:t>
-            </a:r>
-            <a:endParaRPr kumimoji="1" lang="en-US" altLang="ja-JP" sz="2400" dirty="0"/>
-          </a:p>
-        </p:txBody>
-      </p:sp>
-      <p:sp>
-        <p:nvSpPr>
-          <p:cNvPr id="9" name="テキスト ボックス 8">
-            <a:extLst>
-              <a:ext uri="{FF2B5EF4-FFF2-40B4-BE49-F238E27FC236}">
-                <a16:creationId xmlns:a16="http://schemas.microsoft.com/office/drawing/2014/main" id="{195A4FFA-B6D4-48E4-A135-A36FA0DA78C3}"/>
-              </a:ext>
-            </a:extLst>
-          </p:cNvPr>
-          <p:cNvSpPr txBox="1"/>
-          <p:nvPr/>
-        </p:nvSpPr>
-        <p:spPr>
-          <a:xfrm>
-            <a:off x="567542" y="5514526"/>
-            <a:ext cx="5715026" cy="461665"/>
-          </a:xfrm>
-          <a:prstGeom prst="rect">
-            <a:avLst/>
-          </a:prstGeom>
-          <a:noFill/>
-        </p:spPr>
-        <p:txBody>
-          <a:bodyPr wrap="none" rtlCol="0">
-            <a:spAutoFit/>
-          </a:bodyPr>
-          <a:lstStyle/>
-          <a:p>
-            <a:r>
-              <a:rPr kumimoji="1" lang="ja-JP" altLang="en-US" sz="2400" dirty="0"/>
-              <a:t>ここまで設定したら</a:t>
-            </a:r>
-            <a:r>
-              <a:rPr kumimoji="1" lang="en-US" altLang="ja-JP" sz="2400" dirty="0"/>
-              <a:t>Export</a:t>
-            </a:r>
-            <a:r>
-              <a:rPr kumimoji="1" lang="ja-JP" altLang="en-US" sz="2400" dirty="0"/>
-              <a:t>しましょう！</a:t>
-            </a:r>
-            <a:endParaRPr kumimoji="1" lang="en-US" altLang="ja-JP" sz="2400" dirty="0"/>
-          </a:p>
-        </p:txBody>
-      </p:sp>
-      <p:pic>
-        <p:nvPicPr>
-          <p:cNvPr id="5" name="図 4">
-            <a:extLst>
-              <a:ext uri="{FF2B5EF4-FFF2-40B4-BE49-F238E27FC236}">
-                <a16:creationId xmlns:a16="http://schemas.microsoft.com/office/drawing/2014/main" id="{7AC0A771-27A0-4480-B9D9-8526FFBA9DEA}"/>
-              </a:ext>
-            </a:extLst>
-          </p:cNvPr>
-          <p:cNvPicPr>
-            <a:picLocks noChangeAspect="1"/>
-          </p:cNvPicPr>
-          <p:nvPr/>
-        </p:nvPicPr>
-        <p:blipFill>
-          <a:blip r:embed="rId2"/>
-          <a:stretch>
-            <a:fillRect/>
-          </a:stretch>
-        </p:blipFill>
-        <p:spPr>
-          <a:xfrm>
-            <a:off x="567541" y="2187126"/>
-            <a:ext cx="3665597" cy="3062207"/>
-          </a:xfrm>
-          <a:prstGeom prst="rect">
-            <a:avLst/>
-          </a:prstGeom>
-        </p:spPr>
-      </p:pic>
-      <p:sp>
-        <p:nvSpPr>
-          <p:cNvPr id="10" name="矢印: 右 9">
-            <a:extLst>
-              <a:ext uri="{FF2B5EF4-FFF2-40B4-BE49-F238E27FC236}">
-                <a16:creationId xmlns:a16="http://schemas.microsoft.com/office/drawing/2014/main" id="{CFAE88F2-19A9-40AB-B18B-5B214427BAB9}"/>
-              </a:ext>
-            </a:extLst>
-          </p:cNvPr>
-          <p:cNvSpPr/>
-          <p:nvPr/>
-        </p:nvSpPr>
-        <p:spPr>
-          <a:xfrm rot="13679340">
-            <a:off x="3358500" y="3271491"/>
-            <a:ext cx="817913" cy="711200"/>
-          </a:xfrm>
-          <a:prstGeom prst="rightArrow">
-            <a:avLst/>
-          </a:prstGeom>
-          <a:solidFill>
-            <a:srgbClr val="FF0000"/>
-          </a:solidFill>
-          <a:ln w="38100">
-            <a:solidFill>
-              <a:schemeClr val="tx1"/>
-            </a:solidFill>
-          </a:ln>
-        </p:spPr>
-        <p:style>
-          <a:lnRef idx="2">
-            <a:schemeClr val="accent1">
-              <a:shade val="50000"/>
-            </a:schemeClr>
-          </a:lnRef>
-          <a:fillRef idx="1">
-            <a:schemeClr val="accent1"/>
-          </a:fillRef>
-          <a:effectRef idx="0">
-            <a:schemeClr val="accent1"/>
-          </a:effectRef>
-          <a:fontRef idx="minor">
-            <a:schemeClr val="lt1"/>
-          </a:fontRef>
-        </p:style>
-        <p:txBody>
-          <a:bodyPr rtlCol="0" anchor="ctr"/>
-          <a:lstStyle/>
-          <a:p>
-            <a:pPr algn="ctr"/>
-            <a:endParaRPr kumimoji="1" lang="ja-JP" altLang="en-US"/>
-          </a:p>
-        </p:txBody>
-      </p:sp>
-    </p:spTree>
-    <p:extLst>
-      <p:ext uri="{BB962C8B-B14F-4D97-AF65-F5344CB8AC3E}">
-        <p14:creationId xmlns:p14="http://schemas.microsoft.com/office/powerpoint/2010/main" val="575447541"/>
-      </p:ext>
-    </p:extLst>
-  </p:cSld>
-  <p:clrMapOvr>
-    <a:masterClrMapping/>
-  </p:clrMapOvr>
-</p:sld>
-</file>
-
-<file path=ppt/slides/slide5.xml><?xml version="1.0" encoding="utf-8"?>
-<p:sld xmlns:a="http://schemas.openxmlformats.org/drawingml/2006/main" xmlns:r="http://schemas.openxmlformats.org/officeDocument/2006/relationships" xmlns:p="http://schemas.openxmlformats.org/presentationml/2006/main">
-  <p:cSld>
-    <p:spTree>
-      <p:nvGrpSpPr>
-        <p:cNvPr id="1" name=""/>
-        <p:cNvGrpSpPr/>
-        <p:nvPr/>
-      </p:nvGrpSpPr>
-      <p:grpSpPr>
-        <a:xfrm>
-          <a:off x="0" y="0"/>
-          <a:ext cx="0" cy="0"/>
-          <a:chOff x="0" y="0"/>
-          <a:chExt cx="0" cy="0"/>
-        </a:xfrm>
-      </p:grpSpPr>
-      <p:sp>
-        <p:nvSpPr>
-          <p:cNvPr id="4" name="テキスト ボックス 3">
-            <a:extLst>
-              <a:ext uri="{FF2B5EF4-FFF2-40B4-BE49-F238E27FC236}">
-                <a16:creationId xmlns:a16="http://schemas.microsoft.com/office/drawing/2014/main" id="{5A13BF46-B8C5-48AA-8308-C9ECFF431A18}"/>
-              </a:ext>
-            </a:extLst>
-          </p:cNvPr>
-          <p:cNvSpPr txBox="1"/>
-          <p:nvPr/>
-        </p:nvSpPr>
-        <p:spPr>
-          <a:xfrm>
-            <a:off x="567542" y="491954"/>
-            <a:ext cx="3199915" cy="584775"/>
-          </a:xfrm>
-          <a:prstGeom prst="rect">
-            <a:avLst/>
-          </a:prstGeom>
-          <a:noFill/>
-        </p:spPr>
-        <p:txBody>
-          <a:bodyPr wrap="none" rtlCol="0">
-            <a:spAutoFit/>
-          </a:bodyPr>
-          <a:lstStyle/>
-          <a:p>
-            <a:r>
-              <a:rPr kumimoji="1" lang="en-US" altLang="ja-JP" sz="3200" b="1" u="sng" dirty="0"/>
-              <a:t>3D</a:t>
-            </a:r>
-            <a:r>
-              <a:rPr kumimoji="1" lang="ja-JP" altLang="en-US" sz="3200" b="1" u="sng" dirty="0"/>
-              <a:t>モデルの作成</a:t>
-            </a:r>
-            <a:endParaRPr kumimoji="1" lang="en-US" altLang="ja-JP" sz="3200" b="1" u="sng" dirty="0"/>
-          </a:p>
-        </p:txBody>
-      </p:sp>
-      <p:sp>
-        <p:nvSpPr>
-          <p:cNvPr id="6" name="テキスト ボックス 5">
-            <a:extLst>
-              <a:ext uri="{FF2B5EF4-FFF2-40B4-BE49-F238E27FC236}">
-                <a16:creationId xmlns:a16="http://schemas.microsoft.com/office/drawing/2014/main" id="{55830AD6-028B-4C4E-80BF-B70DFC1C3A46}"/>
-              </a:ext>
-            </a:extLst>
-          </p:cNvPr>
-          <p:cNvSpPr txBox="1"/>
-          <p:nvPr/>
-        </p:nvSpPr>
-        <p:spPr>
-          <a:xfrm>
-            <a:off x="567542" y="1216429"/>
-            <a:ext cx="8852103" cy="1200329"/>
-          </a:xfrm>
-          <a:prstGeom prst="rect">
-            <a:avLst/>
-          </a:prstGeom>
-          <a:noFill/>
-        </p:spPr>
-        <p:txBody>
-          <a:bodyPr wrap="none" rtlCol="0">
-            <a:spAutoFit/>
-          </a:bodyPr>
-          <a:lstStyle/>
-          <a:p>
-            <a:r>
-              <a:rPr kumimoji="1" lang="ja-JP" altLang="en-US" sz="2400" dirty="0"/>
-              <a:t>続いて</a:t>
-            </a:r>
-            <a:r>
-              <a:rPr kumimoji="1" lang="en-US" altLang="ja-JP" sz="2400" dirty="0"/>
-              <a:t>FBX</a:t>
-            </a:r>
-            <a:r>
-              <a:rPr kumimoji="1" lang="ja-JP" altLang="en-US" sz="2400" dirty="0"/>
-              <a:t>を</a:t>
-            </a:r>
-            <a:r>
-              <a:rPr kumimoji="1" lang="en-US" altLang="ja-JP" sz="2400" dirty="0" err="1"/>
-              <a:t>Dxlib</a:t>
-            </a:r>
-            <a:r>
-              <a:rPr kumimoji="1" lang="ja-JP" altLang="en-US" sz="2400" dirty="0"/>
-              <a:t>でも使える</a:t>
-            </a:r>
-            <a:r>
-              <a:rPr kumimoji="1" lang="en-US" altLang="ja-JP" sz="2400" b="1" dirty="0">
-                <a:solidFill>
-                  <a:srgbClr val="FF0000"/>
-                </a:solidFill>
-              </a:rPr>
-              <a:t>X</a:t>
-            </a:r>
-            <a:r>
-              <a:rPr kumimoji="1" lang="ja-JP" altLang="en-US" sz="2400" b="1" dirty="0">
-                <a:solidFill>
-                  <a:srgbClr val="FF0000"/>
-                </a:solidFill>
-              </a:rPr>
-              <a:t>ファイルに変換</a:t>
-            </a:r>
-            <a:r>
-              <a:rPr kumimoji="1" lang="ja-JP" altLang="en-US" sz="2400" dirty="0"/>
-              <a:t>します。</a:t>
-            </a:r>
-            <a:endParaRPr kumimoji="1" lang="en-US" altLang="ja-JP" sz="2400" dirty="0"/>
-          </a:p>
-          <a:p>
-            <a:r>
-              <a:rPr lang="ja-JP" altLang="en-US" sz="2400" dirty="0"/>
-              <a:t>まずは「</a:t>
-            </a:r>
-            <a:r>
-              <a:rPr lang="en-US" altLang="ja-JP" sz="2400" b="1" dirty="0" err="1">
-                <a:solidFill>
-                  <a:srgbClr val="FF0000"/>
-                </a:solidFill>
-              </a:rPr>
-              <a:t>DxLib_VC</a:t>
-            </a:r>
-            <a:r>
-              <a:rPr lang="en-US" altLang="ja-JP" sz="2400" b="1" dirty="0">
-                <a:solidFill>
-                  <a:srgbClr val="FF0000"/>
-                </a:solidFill>
-              </a:rPr>
-              <a:t>\Tool\</a:t>
-            </a:r>
-            <a:r>
-              <a:rPr lang="en-US" altLang="ja-JP" sz="2400" b="1" dirty="0" err="1">
-                <a:solidFill>
-                  <a:srgbClr val="FF0000"/>
-                </a:solidFill>
-              </a:rPr>
-              <a:t>DxLibModelViewer</a:t>
-            </a:r>
-            <a:r>
-              <a:rPr lang="ja-JP" altLang="en-US" sz="2400" dirty="0"/>
-              <a:t>」にある、</a:t>
-            </a:r>
-            <a:endParaRPr lang="en-US" altLang="ja-JP" sz="2400" dirty="0"/>
-          </a:p>
-          <a:p>
-            <a:r>
-              <a:rPr kumimoji="1" lang="ja-JP" altLang="en-US" sz="2400" dirty="0"/>
-              <a:t>「</a:t>
-            </a:r>
-            <a:r>
-              <a:rPr kumimoji="1" lang="en-US" altLang="ja-JP" sz="2400" b="1" dirty="0">
-                <a:solidFill>
-                  <a:srgbClr val="FF0000"/>
-                </a:solidFill>
-              </a:rPr>
-              <a:t>DxLibModelViewer_64bit.exe</a:t>
-            </a:r>
-            <a:r>
-              <a:rPr kumimoji="1" lang="ja-JP" altLang="en-US" sz="2400" dirty="0"/>
-              <a:t>」というツールを開きます。</a:t>
-            </a:r>
-            <a:endParaRPr kumimoji="1" lang="en-US" altLang="ja-JP" sz="2400" dirty="0"/>
-          </a:p>
-        </p:txBody>
-      </p:sp>
-      <p:pic>
-        <p:nvPicPr>
-          <p:cNvPr id="5" name="図 4">
-            <a:extLst>
-              <a:ext uri="{FF2B5EF4-FFF2-40B4-BE49-F238E27FC236}">
-                <a16:creationId xmlns:a16="http://schemas.microsoft.com/office/drawing/2014/main" id="{7656A013-993B-4527-9721-CEC8F2709B5E}"/>
-              </a:ext>
-            </a:extLst>
-          </p:cNvPr>
-          <p:cNvPicPr>
-            <a:picLocks noChangeAspect="1"/>
-          </p:cNvPicPr>
-          <p:nvPr/>
-        </p:nvPicPr>
-        <p:blipFill>
-          <a:blip r:embed="rId2">
-            <a:extLst>
-              <a:ext uri="{28A0092B-C50C-407E-A947-70E740481C1C}">
-                <a14:useLocalDpi xmlns:a14="http://schemas.microsoft.com/office/drawing/2010/main" val="0"/>
-              </a:ext>
-            </a:extLst>
-          </a:blip>
-          <a:stretch>
-            <a:fillRect/>
-          </a:stretch>
-        </p:blipFill>
-        <p:spPr>
-          <a:xfrm>
-            <a:off x="567542" y="2556458"/>
-            <a:ext cx="7839858" cy="3890676"/>
-          </a:xfrm>
-          <a:prstGeom prst="rect">
-            <a:avLst/>
-          </a:prstGeom>
-        </p:spPr>
-      </p:pic>
-    </p:spTree>
-    <p:extLst>
-      <p:ext uri="{BB962C8B-B14F-4D97-AF65-F5344CB8AC3E}">
-        <p14:creationId xmlns:p14="http://schemas.microsoft.com/office/powerpoint/2010/main" val="727988672"/>
-      </p:ext>
-    </p:extLst>
-  </p:cSld>
-  <p:clrMapOvr>
-    <a:masterClrMapping/>
-  </p:clrMapOvr>
-</p:sld>
-</file>
-
-<file path=ppt/slides/slide6.xml><?xml version="1.0" encoding="utf-8"?>
-<p:sld xmlns:a="http://schemas.openxmlformats.org/drawingml/2006/main" xmlns:r="http://schemas.openxmlformats.org/officeDocument/2006/relationships" xmlns:p="http://schemas.openxmlformats.org/presentationml/2006/main">
-  <p:cSld>
-    <p:spTree>
-      <p:nvGrpSpPr>
-        <p:cNvPr id="1" name=""/>
-        <p:cNvGrpSpPr/>
-        <p:nvPr/>
-      </p:nvGrpSpPr>
-      <p:grpSpPr>
-        <a:xfrm>
-          <a:off x="0" y="0"/>
-          <a:ext cx="0" cy="0"/>
-          <a:chOff x="0" y="0"/>
-          <a:chExt cx="0" cy="0"/>
-        </a:xfrm>
-      </p:grpSpPr>
-      <p:sp>
-        <p:nvSpPr>
-          <p:cNvPr id="4" name="テキスト ボックス 3">
-            <a:extLst>
-              <a:ext uri="{FF2B5EF4-FFF2-40B4-BE49-F238E27FC236}">
-                <a16:creationId xmlns:a16="http://schemas.microsoft.com/office/drawing/2014/main" id="{5A13BF46-B8C5-48AA-8308-C9ECFF431A18}"/>
-              </a:ext>
-            </a:extLst>
-          </p:cNvPr>
-          <p:cNvSpPr txBox="1"/>
-          <p:nvPr/>
-        </p:nvSpPr>
-        <p:spPr>
-          <a:xfrm>
-            <a:off x="567542" y="491954"/>
-            <a:ext cx="3199915" cy="584775"/>
-          </a:xfrm>
-          <a:prstGeom prst="rect">
-            <a:avLst/>
-          </a:prstGeom>
-          <a:noFill/>
-        </p:spPr>
-        <p:txBody>
-          <a:bodyPr wrap="none" rtlCol="0">
-            <a:spAutoFit/>
-          </a:bodyPr>
-          <a:lstStyle/>
-          <a:p>
-            <a:r>
-              <a:rPr kumimoji="1" lang="en-US" altLang="ja-JP" sz="3200" b="1" u="sng" dirty="0"/>
-              <a:t>3D</a:t>
-            </a:r>
-            <a:r>
-              <a:rPr kumimoji="1" lang="ja-JP" altLang="en-US" sz="3200" b="1" u="sng" dirty="0"/>
-              <a:t>モデルの作成</a:t>
-            </a:r>
-            <a:endParaRPr kumimoji="1" lang="en-US" altLang="ja-JP" sz="3200" b="1" u="sng" dirty="0"/>
-          </a:p>
-        </p:txBody>
-      </p:sp>
-      <p:sp>
-        <p:nvSpPr>
-          <p:cNvPr id="6" name="テキスト ボックス 5">
-            <a:extLst>
-              <a:ext uri="{FF2B5EF4-FFF2-40B4-BE49-F238E27FC236}">
-                <a16:creationId xmlns:a16="http://schemas.microsoft.com/office/drawing/2014/main" id="{55830AD6-028B-4C4E-80BF-B70DFC1C3A46}"/>
-              </a:ext>
-            </a:extLst>
-          </p:cNvPr>
-          <p:cNvSpPr txBox="1"/>
-          <p:nvPr/>
-        </p:nvSpPr>
-        <p:spPr>
-          <a:xfrm>
-            <a:off x="567542" y="1216429"/>
-            <a:ext cx="9089348" cy="461665"/>
-          </a:xfrm>
-          <a:prstGeom prst="rect">
-            <a:avLst/>
-          </a:prstGeom>
-          <a:noFill/>
-        </p:spPr>
-        <p:txBody>
-          <a:bodyPr wrap="none" rtlCol="0">
-            <a:spAutoFit/>
-          </a:bodyPr>
-          <a:lstStyle/>
-          <a:p>
-            <a:r>
-              <a:rPr kumimoji="1" lang="ja-JP" altLang="en-US" sz="2400" dirty="0"/>
-              <a:t>出力した</a:t>
-            </a:r>
-            <a:r>
-              <a:rPr kumimoji="1" lang="en-US" altLang="ja-JP" sz="2400" dirty="0"/>
-              <a:t>FBX</a:t>
-            </a:r>
-            <a:r>
-              <a:rPr kumimoji="1" lang="ja-JP" altLang="en-US" sz="2400" dirty="0"/>
-              <a:t>を画面上にドラッグアンドドロップして開きます。</a:t>
-            </a:r>
-            <a:endParaRPr kumimoji="1" lang="en-US" altLang="ja-JP" sz="2400" dirty="0"/>
-          </a:p>
-        </p:txBody>
-      </p:sp>
-      <p:pic>
-        <p:nvPicPr>
-          <p:cNvPr id="3" name="図 2">
-            <a:extLst>
-              <a:ext uri="{FF2B5EF4-FFF2-40B4-BE49-F238E27FC236}">
-                <a16:creationId xmlns:a16="http://schemas.microsoft.com/office/drawing/2014/main" id="{38A58C5A-D4FD-4A66-B461-2ABD1CB1CDC2}"/>
-              </a:ext>
-            </a:extLst>
-          </p:cNvPr>
-          <p:cNvPicPr>
-            <a:picLocks noChangeAspect="1"/>
-          </p:cNvPicPr>
-          <p:nvPr/>
-        </p:nvPicPr>
-        <p:blipFill>
-          <a:blip r:embed="rId2">
-            <a:extLst>
-              <a:ext uri="{28A0092B-C50C-407E-A947-70E740481C1C}">
-                <a14:useLocalDpi xmlns:a14="http://schemas.microsoft.com/office/drawing/2010/main" val="0"/>
-              </a:ext>
-            </a:extLst>
-          </a:blip>
-          <a:stretch>
-            <a:fillRect/>
-          </a:stretch>
-        </p:blipFill>
-        <p:spPr>
-          <a:xfrm>
-            <a:off x="567542" y="1817794"/>
-            <a:ext cx="9249558" cy="4624779"/>
-          </a:xfrm>
-          <a:prstGeom prst="rect">
-            <a:avLst/>
-          </a:prstGeom>
-        </p:spPr>
-      </p:pic>
-    </p:spTree>
-    <p:extLst>
-      <p:ext uri="{BB962C8B-B14F-4D97-AF65-F5344CB8AC3E}">
-        <p14:creationId xmlns:p14="http://schemas.microsoft.com/office/powerpoint/2010/main" val="2010799776"/>
-      </p:ext>
-    </p:extLst>
-  </p:cSld>
-  <p:clrMapOvr>
-    <a:masterClrMapping/>
-  </p:clrMapOvr>
-</p:sld>
-</file>
-
-<file path=ppt/slides/slide7.xml><?xml version="1.0" encoding="utf-8"?>
-<p:sld xmlns:a="http://schemas.openxmlformats.org/drawingml/2006/main" xmlns:r="http://schemas.openxmlformats.org/officeDocument/2006/relationships" xmlns:p="http://schemas.openxmlformats.org/presentationml/2006/main">
-  <p:cSld>
-    <p:spTree>
-      <p:nvGrpSpPr>
-        <p:cNvPr id="1" name=""/>
-        <p:cNvGrpSpPr/>
-        <p:nvPr/>
-      </p:nvGrpSpPr>
-      <p:grpSpPr>
-        <a:xfrm>
-          <a:off x="0" y="0"/>
-          <a:ext cx="0" cy="0"/>
-          <a:chOff x="0" y="0"/>
-          <a:chExt cx="0" cy="0"/>
-        </a:xfrm>
-      </p:grpSpPr>
-      <p:sp>
-        <p:nvSpPr>
-          <p:cNvPr id="4" name="テキスト ボックス 3">
-            <a:extLst>
-              <a:ext uri="{FF2B5EF4-FFF2-40B4-BE49-F238E27FC236}">
-                <a16:creationId xmlns:a16="http://schemas.microsoft.com/office/drawing/2014/main" id="{5A13BF46-B8C5-48AA-8308-C9ECFF431A18}"/>
-              </a:ext>
-            </a:extLst>
-          </p:cNvPr>
-          <p:cNvSpPr txBox="1"/>
-          <p:nvPr/>
-        </p:nvSpPr>
-        <p:spPr>
-          <a:xfrm>
-            <a:off x="567542" y="491954"/>
-            <a:ext cx="3199915" cy="584775"/>
-          </a:xfrm>
-          <a:prstGeom prst="rect">
-            <a:avLst/>
-          </a:prstGeom>
-          <a:noFill/>
-        </p:spPr>
-        <p:txBody>
-          <a:bodyPr wrap="none" rtlCol="0">
-            <a:spAutoFit/>
-          </a:bodyPr>
-          <a:lstStyle/>
-          <a:p>
-            <a:r>
-              <a:rPr kumimoji="1" lang="en-US" altLang="ja-JP" sz="3200" b="1" u="sng" dirty="0"/>
-              <a:t>3D</a:t>
-            </a:r>
-            <a:r>
-              <a:rPr kumimoji="1" lang="ja-JP" altLang="en-US" sz="3200" b="1" u="sng" dirty="0"/>
-              <a:t>モデルの作成</a:t>
-            </a:r>
-            <a:endParaRPr kumimoji="1" lang="en-US" altLang="ja-JP" sz="3200" b="1" u="sng" dirty="0"/>
-          </a:p>
-        </p:txBody>
-      </p:sp>
-      <p:sp>
-        <p:nvSpPr>
-          <p:cNvPr id="6" name="テキスト ボックス 5">
-            <a:extLst>
-              <a:ext uri="{FF2B5EF4-FFF2-40B4-BE49-F238E27FC236}">
-                <a16:creationId xmlns:a16="http://schemas.microsoft.com/office/drawing/2014/main" id="{55830AD6-028B-4C4E-80BF-B70DFC1C3A46}"/>
-              </a:ext>
-            </a:extLst>
-          </p:cNvPr>
-          <p:cNvSpPr txBox="1"/>
-          <p:nvPr/>
-        </p:nvSpPr>
-        <p:spPr>
-          <a:xfrm>
-            <a:off x="567542" y="1216429"/>
-            <a:ext cx="8802410" cy="1200329"/>
-          </a:xfrm>
-          <a:prstGeom prst="rect">
-            <a:avLst/>
-          </a:prstGeom>
-          <a:noFill/>
-        </p:spPr>
-        <p:txBody>
-          <a:bodyPr wrap="none" rtlCol="0">
-            <a:spAutoFit/>
-          </a:bodyPr>
-          <a:lstStyle/>
-          <a:p>
-            <a:r>
-              <a:rPr kumimoji="1" lang="ja-JP" altLang="en-US" sz="2400" dirty="0"/>
-              <a:t>作ったモデルが暗い場合は、</a:t>
-            </a:r>
-            <a:endParaRPr kumimoji="1" lang="en-US" altLang="ja-JP" sz="2400" dirty="0"/>
-          </a:p>
-          <a:p>
-            <a:r>
-              <a:rPr lang="ja-JP" altLang="en-US" sz="2400" dirty="0"/>
-              <a:t>「</a:t>
-            </a:r>
-            <a:r>
-              <a:rPr lang="ja-JP" altLang="en-US" sz="2400" b="1" dirty="0">
-                <a:solidFill>
-                  <a:srgbClr val="FF0000"/>
-                </a:solidFill>
-              </a:rPr>
-              <a:t>マテリアル　＞　自己発光　＞　輝度</a:t>
-            </a:r>
-            <a:r>
-              <a:rPr lang="ja-JP" altLang="en-US" sz="2400" dirty="0"/>
-              <a:t>」から調節できます。</a:t>
-            </a:r>
-            <a:endParaRPr lang="en-US" altLang="ja-JP" sz="2400" dirty="0"/>
-          </a:p>
-          <a:p>
-            <a:r>
-              <a:rPr lang="ja-JP" altLang="en-US" sz="2400" dirty="0"/>
-              <a:t>　　　　　　　　（</a:t>
-            </a:r>
-            <a:r>
-              <a:rPr lang="en-US" altLang="ja-JP" sz="2400" dirty="0"/>
-              <a:t>0.5</a:t>
-            </a:r>
-            <a:r>
-              <a:rPr lang="ja-JP" altLang="en-US" sz="2400" dirty="0"/>
-              <a:t>くらい</a:t>
-            </a:r>
-            <a:r>
-              <a:rPr lang="ja-JP" altLang="en-US" sz="2400"/>
-              <a:t>がちょうど良さそう）</a:t>
-            </a:r>
-            <a:endParaRPr lang="en-US" altLang="ja-JP" sz="2400" dirty="0"/>
-          </a:p>
-        </p:txBody>
-      </p:sp>
-      <p:pic>
-        <p:nvPicPr>
-          <p:cNvPr id="5" name="図 4">
-            <a:extLst>
-              <a:ext uri="{FF2B5EF4-FFF2-40B4-BE49-F238E27FC236}">
-                <a16:creationId xmlns:a16="http://schemas.microsoft.com/office/drawing/2014/main" id="{4C10B004-E591-4042-929D-EBA2DC4D2669}"/>
-              </a:ext>
-            </a:extLst>
-          </p:cNvPr>
-          <p:cNvPicPr>
-            <a:picLocks noChangeAspect="1"/>
-          </p:cNvPicPr>
-          <p:nvPr/>
-        </p:nvPicPr>
-        <p:blipFill>
-          <a:blip r:embed="rId2">
-            <a:extLst>
-              <a:ext uri="{28A0092B-C50C-407E-A947-70E740481C1C}">
-                <a14:useLocalDpi xmlns:a14="http://schemas.microsoft.com/office/drawing/2010/main" val="0"/>
-              </a:ext>
-            </a:extLst>
-          </a:blip>
-          <a:stretch>
-            <a:fillRect/>
-          </a:stretch>
-        </p:blipFill>
-        <p:spPr>
-          <a:xfrm>
-            <a:off x="567542" y="2187126"/>
-            <a:ext cx="2061384" cy="4327974"/>
-          </a:xfrm>
-          <a:prstGeom prst="rect">
-            <a:avLst/>
-          </a:prstGeom>
-        </p:spPr>
-      </p:pic>
-      <p:sp>
-        <p:nvSpPr>
-          <p:cNvPr id="7" name="矢印: 右 6">
-            <a:extLst>
-              <a:ext uri="{FF2B5EF4-FFF2-40B4-BE49-F238E27FC236}">
-                <a16:creationId xmlns:a16="http://schemas.microsoft.com/office/drawing/2014/main" id="{C3D4BA63-DAF1-4317-ACF8-0FE41BC3A96F}"/>
-              </a:ext>
-            </a:extLst>
-          </p:cNvPr>
-          <p:cNvSpPr/>
-          <p:nvPr/>
-        </p:nvSpPr>
-        <p:spPr>
-          <a:xfrm rot="13679340">
-            <a:off x="1477918" y="2547382"/>
-            <a:ext cx="501301" cy="382630"/>
-          </a:xfrm>
-          <a:prstGeom prst="rightArrow">
-            <a:avLst/>
-          </a:prstGeom>
-          <a:solidFill>
-            <a:srgbClr val="FF0000"/>
-          </a:solidFill>
-          <a:ln w="38100">
-            <a:solidFill>
-              <a:schemeClr val="tx1"/>
-            </a:solidFill>
-          </a:ln>
-        </p:spPr>
-        <p:style>
-          <a:lnRef idx="2">
-            <a:schemeClr val="accent1">
-              <a:shade val="50000"/>
-            </a:schemeClr>
-          </a:lnRef>
-          <a:fillRef idx="1">
-            <a:schemeClr val="accent1"/>
-          </a:fillRef>
-          <a:effectRef idx="0">
-            <a:schemeClr val="accent1"/>
-          </a:effectRef>
-          <a:fontRef idx="minor">
-            <a:schemeClr val="lt1"/>
-          </a:fontRef>
-        </p:style>
-        <p:txBody>
-          <a:bodyPr rtlCol="0" anchor="ctr"/>
-          <a:lstStyle/>
-          <a:p>
-            <a:pPr algn="ctr"/>
-            <a:endParaRPr kumimoji="1" lang="ja-JP" altLang="en-US"/>
-          </a:p>
-        </p:txBody>
-      </p:sp>
-      <p:sp>
-        <p:nvSpPr>
-          <p:cNvPr id="9" name="矢印: 右 8">
-            <a:extLst>
-              <a:ext uri="{FF2B5EF4-FFF2-40B4-BE49-F238E27FC236}">
-                <a16:creationId xmlns:a16="http://schemas.microsoft.com/office/drawing/2014/main" id="{B1341922-F535-4DA8-B2B1-E14C856EC414}"/>
-              </a:ext>
-            </a:extLst>
-          </p:cNvPr>
-          <p:cNvSpPr/>
-          <p:nvPr/>
-        </p:nvSpPr>
-        <p:spPr>
-          <a:xfrm rot="13679340">
-            <a:off x="742451" y="2708172"/>
-            <a:ext cx="501301" cy="382630"/>
-          </a:xfrm>
-          <a:prstGeom prst="rightArrow">
-            <a:avLst/>
-          </a:prstGeom>
-          <a:solidFill>
-            <a:srgbClr val="FF0000"/>
-          </a:solidFill>
-          <a:ln w="38100">
-            <a:solidFill>
-              <a:schemeClr val="tx1"/>
-            </a:solidFill>
-          </a:ln>
-        </p:spPr>
-        <p:style>
-          <a:lnRef idx="2">
-            <a:schemeClr val="accent1">
-              <a:shade val="50000"/>
-            </a:schemeClr>
-          </a:lnRef>
-          <a:fillRef idx="1">
-            <a:schemeClr val="accent1"/>
-          </a:fillRef>
-          <a:effectRef idx="0">
-            <a:schemeClr val="accent1"/>
-          </a:effectRef>
-          <a:fontRef idx="minor">
-            <a:schemeClr val="lt1"/>
-          </a:fontRef>
-        </p:style>
-        <p:txBody>
-          <a:bodyPr rtlCol="0" anchor="ctr"/>
-          <a:lstStyle/>
-          <a:p>
-            <a:pPr algn="ctr"/>
-            <a:endParaRPr kumimoji="1" lang="ja-JP" altLang="en-US"/>
-          </a:p>
-        </p:txBody>
-      </p:sp>
-      <p:sp>
-        <p:nvSpPr>
-          <p:cNvPr id="10" name="矢印: 右 9">
-            <a:extLst>
-              <a:ext uri="{FF2B5EF4-FFF2-40B4-BE49-F238E27FC236}">
-                <a16:creationId xmlns:a16="http://schemas.microsoft.com/office/drawing/2014/main" id="{726CCE82-E5CF-44AC-BA70-804B6F3BCF78}"/>
-              </a:ext>
-            </a:extLst>
-          </p:cNvPr>
-          <p:cNvSpPr/>
-          <p:nvPr/>
-        </p:nvSpPr>
-        <p:spPr>
-          <a:xfrm rot="13679340">
-            <a:off x="1052355" y="5610762"/>
-            <a:ext cx="501301" cy="382630"/>
-          </a:xfrm>
-          <a:prstGeom prst="rightArrow">
-            <a:avLst/>
-          </a:prstGeom>
-          <a:solidFill>
-            <a:srgbClr val="FF0000"/>
-          </a:solidFill>
-          <a:ln w="38100">
-            <a:solidFill>
-              <a:schemeClr val="tx1"/>
-            </a:solidFill>
-          </a:ln>
-        </p:spPr>
-        <p:style>
-          <a:lnRef idx="2">
-            <a:schemeClr val="accent1">
-              <a:shade val="50000"/>
-            </a:schemeClr>
-          </a:lnRef>
-          <a:fillRef idx="1">
-            <a:schemeClr val="accent1"/>
-          </a:fillRef>
-          <a:effectRef idx="0">
-            <a:schemeClr val="accent1"/>
-          </a:effectRef>
-          <a:fontRef idx="minor">
-            <a:schemeClr val="lt1"/>
-          </a:fontRef>
-        </p:style>
-        <p:txBody>
-          <a:bodyPr rtlCol="0" anchor="ctr"/>
-          <a:lstStyle/>
-          <a:p>
-            <a:pPr algn="ctr"/>
-            <a:endParaRPr kumimoji="1" lang="ja-JP" altLang="en-US"/>
-          </a:p>
-        </p:txBody>
-      </p:sp>
-      <p:sp>
-        <p:nvSpPr>
-          <p:cNvPr id="11" name="矢印: 右 10">
-            <a:extLst>
-              <a:ext uri="{FF2B5EF4-FFF2-40B4-BE49-F238E27FC236}">
-                <a16:creationId xmlns:a16="http://schemas.microsoft.com/office/drawing/2014/main" id="{59E17B67-D2E5-436B-AD74-0669DBFB699C}"/>
-              </a:ext>
-            </a:extLst>
-          </p:cNvPr>
-          <p:cNvSpPr/>
-          <p:nvPr/>
-        </p:nvSpPr>
-        <p:spPr>
-          <a:xfrm rot="8515066">
-            <a:off x="830470" y="4849453"/>
-            <a:ext cx="400567" cy="382630"/>
-          </a:xfrm>
-          <a:prstGeom prst="rightArrow">
-            <a:avLst/>
-          </a:prstGeom>
-          <a:solidFill>
-            <a:srgbClr val="FF0000"/>
-          </a:solidFill>
-          <a:ln w="38100">
-            <a:solidFill>
-              <a:schemeClr val="tx1"/>
-            </a:solidFill>
-          </a:ln>
-        </p:spPr>
-        <p:style>
-          <a:lnRef idx="2">
-            <a:schemeClr val="accent1">
-              <a:shade val="50000"/>
-            </a:schemeClr>
-          </a:lnRef>
-          <a:fillRef idx="1">
-            <a:schemeClr val="accent1"/>
-          </a:fillRef>
-          <a:effectRef idx="0">
-            <a:schemeClr val="accent1"/>
-          </a:effectRef>
-          <a:fontRef idx="minor">
-            <a:schemeClr val="lt1"/>
-          </a:fontRef>
-        </p:style>
-        <p:txBody>
-          <a:bodyPr rtlCol="0" anchor="ctr"/>
-          <a:lstStyle/>
-          <a:p>
-            <a:pPr algn="ctr"/>
-            <a:endParaRPr kumimoji="1" lang="ja-JP" altLang="en-US"/>
-          </a:p>
-        </p:txBody>
-      </p:sp>
-    </p:spTree>
-    <p:extLst>
-      <p:ext uri="{BB962C8B-B14F-4D97-AF65-F5344CB8AC3E}">
-        <p14:creationId xmlns:p14="http://schemas.microsoft.com/office/powerpoint/2010/main" val="2646231724"/>
-      </p:ext>
-    </p:extLst>
-  </p:cSld>
-  <p:clrMapOvr>
-    <a:masterClrMapping/>
-  </p:clrMapOvr>
-</p:sld>
-</file>
-
-<file path=ppt/slides/slide8.xml><?xml version="1.0" encoding="utf-8"?>
-<p:sld xmlns:a="http://schemas.openxmlformats.org/drawingml/2006/main" xmlns:r="http://schemas.openxmlformats.org/officeDocument/2006/relationships" xmlns:p="http://schemas.openxmlformats.org/presentationml/2006/main">
-  <p:cSld>
-    <p:spTree>
-      <p:nvGrpSpPr>
-        <p:cNvPr id="1" name=""/>
-        <p:cNvGrpSpPr/>
-        <p:nvPr/>
-      </p:nvGrpSpPr>
-      <p:grpSpPr>
-        <a:xfrm>
-          <a:off x="0" y="0"/>
-          <a:ext cx="0" cy="0"/>
-          <a:chOff x="0" y="0"/>
-          <a:chExt cx="0" cy="0"/>
-        </a:xfrm>
-      </p:grpSpPr>
-      <p:sp>
-        <p:nvSpPr>
-          <p:cNvPr id="4" name="テキスト ボックス 3">
-            <a:extLst>
-              <a:ext uri="{FF2B5EF4-FFF2-40B4-BE49-F238E27FC236}">
-                <a16:creationId xmlns:a16="http://schemas.microsoft.com/office/drawing/2014/main" id="{5A13BF46-B8C5-48AA-8308-C9ECFF431A18}"/>
-              </a:ext>
-            </a:extLst>
-          </p:cNvPr>
-          <p:cNvSpPr txBox="1"/>
-          <p:nvPr/>
-        </p:nvSpPr>
-        <p:spPr>
-          <a:xfrm>
-            <a:off x="567542" y="491954"/>
-            <a:ext cx="3199915" cy="584775"/>
-          </a:xfrm>
-          <a:prstGeom prst="rect">
-            <a:avLst/>
-          </a:prstGeom>
-          <a:noFill/>
-        </p:spPr>
-        <p:txBody>
-          <a:bodyPr wrap="none" rtlCol="0">
-            <a:spAutoFit/>
-          </a:bodyPr>
-          <a:lstStyle/>
-          <a:p>
-            <a:r>
-              <a:rPr kumimoji="1" lang="en-US" altLang="ja-JP" sz="3200" b="1" u="sng" dirty="0"/>
-              <a:t>3D</a:t>
-            </a:r>
-            <a:r>
-              <a:rPr kumimoji="1" lang="ja-JP" altLang="en-US" sz="3200" b="1" u="sng" dirty="0"/>
-              <a:t>モデルの作成</a:t>
-            </a:r>
-            <a:endParaRPr kumimoji="1" lang="en-US" altLang="ja-JP" sz="3200" b="1" u="sng" dirty="0"/>
-          </a:p>
-        </p:txBody>
-      </p:sp>
-      <p:sp>
-        <p:nvSpPr>
-          <p:cNvPr id="6" name="テキスト ボックス 5">
-            <a:extLst>
-              <a:ext uri="{FF2B5EF4-FFF2-40B4-BE49-F238E27FC236}">
-                <a16:creationId xmlns:a16="http://schemas.microsoft.com/office/drawing/2014/main" id="{55830AD6-028B-4C4E-80BF-B70DFC1C3A46}"/>
-              </a:ext>
-            </a:extLst>
-          </p:cNvPr>
-          <p:cNvSpPr txBox="1"/>
-          <p:nvPr/>
-        </p:nvSpPr>
-        <p:spPr>
-          <a:xfrm>
-            <a:off x="567542" y="1216429"/>
-            <a:ext cx="7571303" cy="830997"/>
-          </a:xfrm>
-          <a:prstGeom prst="rect">
-            <a:avLst/>
-          </a:prstGeom>
-          <a:noFill/>
-        </p:spPr>
-        <p:txBody>
-          <a:bodyPr wrap="none" rtlCol="0">
-            <a:spAutoFit/>
-          </a:bodyPr>
-          <a:lstStyle/>
-          <a:p>
-            <a:r>
-              <a:rPr kumimoji="1" lang="ja-JP" altLang="en-US" sz="2400" dirty="0"/>
-              <a:t>調整が終わったら</a:t>
-            </a:r>
-            <a:r>
-              <a:rPr kumimoji="1" lang="en-US" altLang="ja-JP" sz="2400" dirty="0"/>
-              <a:t>X</a:t>
-            </a:r>
-            <a:r>
-              <a:rPr kumimoji="1" lang="ja-JP" altLang="en-US" sz="2400" dirty="0"/>
-              <a:t>ファイル形式で保存します。</a:t>
-            </a:r>
-            <a:endParaRPr kumimoji="1" lang="en-US" altLang="ja-JP" sz="2400" dirty="0"/>
-          </a:p>
-          <a:p>
-            <a:r>
-              <a:rPr lang="ja-JP" altLang="en-US" sz="2400" dirty="0"/>
-              <a:t>「</a:t>
-            </a:r>
-            <a:r>
-              <a:rPr lang="ja-JP" altLang="en-US" sz="2400" b="1" dirty="0">
-                <a:solidFill>
-                  <a:srgbClr val="FF0000"/>
-                </a:solidFill>
-              </a:rPr>
-              <a:t>ファイル　＞　名前を付けて保存</a:t>
-            </a:r>
-            <a:r>
-              <a:rPr lang="ja-JP" altLang="en-US" sz="2400" dirty="0"/>
-              <a:t>」を選択します。</a:t>
-            </a:r>
-            <a:endParaRPr kumimoji="1" lang="en-US" altLang="ja-JP" sz="2400" dirty="0"/>
-          </a:p>
-        </p:txBody>
-      </p:sp>
-      <p:pic>
-        <p:nvPicPr>
-          <p:cNvPr id="3" name="図 2">
-            <a:extLst>
-              <a:ext uri="{FF2B5EF4-FFF2-40B4-BE49-F238E27FC236}">
-                <a16:creationId xmlns:a16="http://schemas.microsoft.com/office/drawing/2014/main" id="{441418A5-930D-49F2-A721-88BA06C5DD90}"/>
-              </a:ext>
-            </a:extLst>
-          </p:cNvPr>
-          <p:cNvPicPr>
-            <a:picLocks noChangeAspect="1"/>
-          </p:cNvPicPr>
-          <p:nvPr/>
-        </p:nvPicPr>
-        <p:blipFill>
-          <a:blip r:embed="rId2">
-            <a:extLst>
-              <a:ext uri="{28A0092B-C50C-407E-A947-70E740481C1C}">
-                <a14:useLocalDpi xmlns:a14="http://schemas.microsoft.com/office/drawing/2010/main" val="0"/>
-              </a:ext>
-            </a:extLst>
-          </a:blip>
-          <a:stretch>
-            <a:fillRect/>
-          </a:stretch>
-        </p:blipFill>
-        <p:spPr>
-          <a:xfrm>
-            <a:off x="567542" y="2185814"/>
-            <a:ext cx="5365208" cy="3656186"/>
-          </a:xfrm>
-          <a:prstGeom prst="rect">
-            <a:avLst/>
-          </a:prstGeom>
-        </p:spPr>
-      </p:pic>
-    </p:spTree>
-    <p:extLst>
-      <p:ext uri="{BB962C8B-B14F-4D97-AF65-F5344CB8AC3E}">
-        <p14:creationId xmlns:p14="http://schemas.microsoft.com/office/powerpoint/2010/main" val="339653175"/>
-      </p:ext>
-    </p:extLst>
-  </p:cSld>
-  <p:clrMapOvr>
-    <a:masterClrMapping/>
-  </p:clrMapOvr>
-</p:sld>
-</file>
-
-<file path=ppt/slides/slide9.xml><?xml version="1.0" encoding="utf-8"?>
-<p:sld xmlns:a="http://schemas.openxmlformats.org/drawingml/2006/main" xmlns:r="http://schemas.openxmlformats.org/officeDocument/2006/relationships" xmlns:p="http://schemas.openxmlformats.org/presentationml/2006/main">
-  <p:cSld>
-    <p:spTree>
-      <p:nvGrpSpPr>
-        <p:cNvPr id="1" name=""/>
-        <p:cNvGrpSpPr/>
-        <p:nvPr/>
-      </p:nvGrpSpPr>
-      <p:grpSpPr>
-        <a:xfrm>
-          <a:off x="0" y="0"/>
-          <a:ext cx="0" cy="0"/>
-          <a:chOff x="0" y="0"/>
-          <a:chExt cx="0" cy="0"/>
-        </a:xfrm>
-      </p:grpSpPr>
-      <p:sp>
-        <p:nvSpPr>
-          <p:cNvPr id="4" name="テキスト ボックス 3">
-            <a:extLst>
-              <a:ext uri="{FF2B5EF4-FFF2-40B4-BE49-F238E27FC236}">
-                <a16:creationId xmlns:a16="http://schemas.microsoft.com/office/drawing/2014/main" id="{5A13BF46-B8C5-48AA-8308-C9ECFF431A18}"/>
-              </a:ext>
-            </a:extLst>
-          </p:cNvPr>
-          <p:cNvSpPr txBox="1"/>
-          <p:nvPr/>
-        </p:nvSpPr>
-        <p:spPr>
-          <a:xfrm>
-            <a:off x="567542" y="491954"/>
-            <a:ext cx="3199915" cy="584775"/>
-          </a:xfrm>
-          <a:prstGeom prst="rect">
-            <a:avLst/>
-          </a:prstGeom>
-          <a:noFill/>
-        </p:spPr>
-        <p:txBody>
-          <a:bodyPr wrap="none" rtlCol="0">
-            <a:spAutoFit/>
-          </a:bodyPr>
-          <a:lstStyle/>
-          <a:p>
-            <a:r>
-              <a:rPr kumimoji="1" lang="en-US" altLang="ja-JP" sz="3200" b="1" u="sng" dirty="0"/>
-              <a:t>3D</a:t>
-            </a:r>
-            <a:r>
-              <a:rPr kumimoji="1" lang="ja-JP" altLang="en-US" sz="3200" b="1" u="sng" dirty="0"/>
-              <a:t>モデルの作成</a:t>
-            </a:r>
-            <a:endParaRPr kumimoji="1" lang="en-US" altLang="ja-JP" sz="3200" b="1" u="sng" dirty="0"/>
-          </a:p>
-        </p:txBody>
-      </p:sp>
-      <p:sp>
-        <p:nvSpPr>
-          <p:cNvPr id="6" name="テキスト ボックス 5">
-            <a:extLst>
-              <a:ext uri="{FF2B5EF4-FFF2-40B4-BE49-F238E27FC236}">
-                <a16:creationId xmlns:a16="http://schemas.microsoft.com/office/drawing/2014/main" id="{55830AD6-028B-4C4E-80BF-B70DFC1C3A46}"/>
-              </a:ext>
-            </a:extLst>
-          </p:cNvPr>
-          <p:cNvSpPr txBox="1"/>
-          <p:nvPr/>
-        </p:nvSpPr>
-        <p:spPr>
-          <a:xfrm>
-            <a:off x="567542" y="1216429"/>
-            <a:ext cx="7473521" cy="830997"/>
-          </a:xfrm>
-          <a:prstGeom prst="rect">
-            <a:avLst/>
-          </a:prstGeom>
-          <a:noFill/>
-        </p:spPr>
-        <p:txBody>
-          <a:bodyPr wrap="none" rtlCol="0">
-            <a:spAutoFit/>
-          </a:bodyPr>
-          <a:lstStyle/>
-          <a:p>
-            <a:r>
-              <a:rPr kumimoji="1" lang="ja-JP" altLang="en-US" sz="2400" b="1" dirty="0">
-                <a:solidFill>
-                  <a:srgbClr val="FF0000"/>
-                </a:solidFill>
-              </a:rPr>
-              <a:t>ファイルの種類を</a:t>
-            </a:r>
-            <a:r>
-              <a:rPr kumimoji="1" lang="en-US" altLang="ja-JP" sz="2400" b="1" dirty="0">
-                <a:solidFill>
-                  <a:srgbClr val="FF0000"/>
-                </a:solidFill>
-              </a:rPr>
-              <a:t>X</a:t>
-            </a:r>
-            <a:r>
-              <a:rPr kumimoji="1" lang="ja-JP" altLang="en-US" sz="2400" b="1" dirty="0">
-                <a:solidFill>
-                  <a:srgbClr val="FF0000"/>
-                </a:solidFill>
-              </a:rPr>
-              <a:t>ファイル</a:t>
-            </a:r>
-            <a:r>
-              <a:rPr kumimoji="1" lang="ja-JP" altLang="en-US" sz="2400" dirty="0"/>
-              <a:t>に指定して保存します。</a:t>
-            </a:r>
-            <a:endParaRPr kumimoji="1" lang="en-US" altLang="ja-JP" sz="2400" dirty="0"/>
-          </a:p>
-          <a:p>
-            <a:r>
-              <a:rPr lang="ja-JP" altLang="en-US" sz="2400" dirty="0"/>
-              <a:t>これで</a:t>
-            </a:r>
-            <a:r>
-              <a:rPr lang="en-US" altLang="ja-JP" sz="2400" dirty="0" err="1"/>
-              <a:t>Dxlib</a:t>
-            </a:r>
-            <a:r>
-              <a:rPr lang="ja-JP" altLang="en-US" sz="2400" dirty="0"/>
-              <a:t>でも使用することができます。</a:t>
-            </a:r>
-            <a:endParaRPr kumimoji="1" lang="en-US" altLang="ja-JP" sz="2400" dirty="0"/>
-          </a:p>
-        </p:txBody>
-      </p:sp>
-      <p:pic>
-        <p:nvPicPr>
-          <p:cNvPr id="5" name="図 4">
-            <a:extLst>
-              <a:ext uri="{FF2B5EF4-FFF2-40B4-BE49-F238E27FC236}">
-                <a16:creationId xmlns:a16="http://schemas.microsoft.com/office/drawing/2014/main" id="{D36E4DDC-E099-43E2-858A-A14DB9772728}"/>
-              </a:ext>
-            </a:extLst>
-          </p:cNvPr>
-          <p:cNvPicPr>
-            <a:picLocks noChangeAspect="1"/>
-          </p:cNvPicPr>
-          <p:nvPr/>
-        </p:nvPicPr>
-        <p:blipFill>
-          <a:blip r:embed="rId2">
-            <a:extLst>
-              <a:ext uri="{28A0092B-C50C-407E-A947-70E740481C1C}">
-                <a14:useLocalDpi xmlns:a14="http://schemas.microsoft.com/office/drawing/2010/main" val="0"/>
-              </a:ext>
-            </a:extLst>
-          </a:blip>
-          <a:stretch>
-            <a:fillRect/>
-          </a:stretch>
-        </p:blipFill>
-        <p:spPr>
-          <a:xfrm>
-            <a:off x="567542" y="2187126"/>
-            <a:ext cx="7397079" cy="4178920"/>
-          </a:xfrm>
-          <a:prstGeom prst="rect">
-            <a:avLst/>
-          </a:prstGeom>
-        </p:spPr>
-      </p:pic>
-      <p:sp>
-        <p:nvSpPr>
-          <p:cNvPr id="7" name="矢印: 右 6">
-            <a:extLst>
-              <a:ext uri="{FF2B5EF4-FFF2-40B4-BE49-F238E27FC236}">
-                <a16:creationId xmlns:a16="http://schemas.microsoft.com/office/drawing/2014/main" id="{BF172CFE-F36D-42AD-8978-559A81B978D8}"/>
-              </a:ext>
-            </a:extLst>
-          </p:cNvPr>
-          <p:cNvSpPr/>
-          <p:nvPr/>
-        </p:nvSpPr>
-        <p:spPr>
-          <a:xfrm rot="13679340">
-            <a:off x="1916849" y="5860453"/>
-            <a:ext cx="501301" cy="382630"/>
-          </a:xfrm>
-          <a:prstGeom prst="rightArrow">
-            <a:avLst/>
-          </a:prstGeom>
-          <a:solidFill>
-            <a:srgbClr val="FF0000"/>
-          </a:solidFill>
-          <a:ln w="38100">
-            <a:solidFill>
-              <a:schemeClr val="tx1"/>
-            </a:solidFill>
-          </a:ln>
-        </p:spPr>
-        <p:style>
-          <a:lnRef idx="2">
-            <a:schemeClr val="accent1">
-              <a:shade val="50000"/>
-            </a:schemeClr>
-          </a:lnRef>
-          <a:fillRef idx="1">
-            <a:schemeClr val="accent1"/>
-          </a:fillRef>
-          <a:effectRef idx="0">
-            <a:schemeClr val="accent1"/>
-          </a:effectRef>
-          <a:fontRef idx="minor">
-            <a:schemeClr val="lt1"/>
-          </a:fontRef>
-        </p:style>
-        <p:txBody>
-          <a:bodyPr rtlCol="0" anchor="ctr"/>
-          <a:lstStyle/>
-          <a:p>
-            <a:pPr algn="ctr"/>
-            <a:endParaRPr kumimoji="1" lang="ja-JP" altLang="en-US"/>
-          </a:p>
-        </p:txBody>
-      </p:sp>
-    </p:spTree>
-    <p:extLst>
-      <p:ext uri="{BB962C8B-B14F-4D97-AF65-F5344CB8AC3E}">
-        <p14:creationId xmlns:p14="http://schemas.microsoft.com/office/powerpoint/2010/main" val="2669871982"/>
       </p:ext>
     </p:extLst>
   </p:cSld>

--- a/ゲーム科2年/01_後期/ゲームAI概論/04_ここまでの課題.pptx
+++ b/ゲーム科2年/01_後期/ゲームAI概論/04_ここまでの課題.pptx
@@ -259,7 +259,7 @@
           <a:p>
             <a:fld id="{E9CC885B-4903-4D54-9A93-00025F12DED9}" type="datetimeFigureOut">
               <a:rPr kumimoji="1" lang="ja-JP" altLang="en-US" smtClean="0"/>
-              <a:t>2025/7/9</a:t>
+              <a:t>2026/2/10</a:t>
             </a:fld>
             <a:endParaRPr kumimoji="1" lang="ja-JP" altLang="en-US"/>
           </a:p>
@@ -489,7 +489,7 @@
           <a:p>
             <a:fld id="{E9CC885B-4903-4D54-9A93-00025F12DED9}" type="datetimeFigureOut">
               <a:rPr kumimoji="1" lang="ja-JP" altLang="en-US" smtClean="0"/>
-              <a:t>2025/7/9</a:t>
+              <a:t>2026/2/10</a:t>
             </a:fld>
             <a:endParaRPr kumimoji="1" lang="ja-JP" altLang="en-US"/>
           </a:p>
@@ -729,7 +729,7 @@
           <a:p>
             <a:fld id="{E9CC885B-4903-4D54-9A93-00025F12DED9}" type="datetimeFigureOut">
               <a:rPr kumimoji="1" lang="ja-JP" altLang="en-US" smtClean="0"/>
-              <a:t>2025/7/9</a:t>
+              <a:t>2026/2/10</a:t>
             </a:fld>
             <a:endParaRPr kumimoji="1" lang="ja-JP" altLang="en-US"/>
           </a:p>
@@ -959,7 +959,7 @@
           <a:p>
             <a:fld id="{E9CC885B-4903-4D54-9A93-00025F12DED9}" type="datetimeFigureOut">
               <a:rPr kumimoji="1" lang="ja-JP" altLang="en-US" smtClean="0"/>
-              <a:t>2025/7/9</a:t>
+              <a:t>2026/2/10</a:t>
             </a:fld>
             <a:endParaRPr kumimoji="1" lang="ja-JP" altLang="en-US"/>
           </a:p>
@@ -1234,7 +1234,7 @@
           <a:p>
             <a:fld id="{E9CC885B-4903-4D54-9A93-00025F12DED9}" type="datetimeFigureOut">
               <a:rPr kumimoji="1" lang="ja-JP" altLang="en-US" smtClean="0"/>
-              <a:t>2025/7/9</a:t>
+              <a:t>2026/2/10</a:t>
             </a:fld>
             <a:endParaRPr kumimoji="1" lang="ja-JP" altLang="en-US"/>
           </a:p>
@@ -1563,7 +1563,7 @@
           <a:p>
             <a:fld id="{E9CC885B-4903-4D54-9A93-00025F12DED9}" type="datetimeFigureOut">
               <a:rPr kumimoji="1" lang="ja-JP" altLang="en-US" smtClean="0"/>
-              <a:t>2025/7/9</a:t>
+              <a:t>2026/2/10</a:t>
             </a:fld>
             <a:endParaRPr kumimoji="1" lang="ja-JP" altLang="en-US"/>
           </a:p>
@@ -2039,7 +2039,7 @@
           <a:p>
             <a:fld id="{E9CC885B-4903-4D54-9A93-00025F12DED9}" type="datetimeFigureOut">
               <a:rPr kumimoji="1" lang="ja-JP" altLang="en-US" smtClean="0"/>
-              <a:t>2025/7/9</a:t>
+              <a:t>2026/2/10</a:t>
             </a:fld>
             <a:endParaRPr kumimoji="1" lang="ja-JP" altLang="en-US"/>
           </a:p>
@@ -2180,7 +2180,7 @@
           <a:p>
             <a:fld id="{E9CC885B-4903-4D54-9A93-00025F12DED9}" type="datetimeFigureOut">
               <a:rPr kumimoji="1" lang="ja-JP" altLang="en-US" smtClean="0"/>
-              <a:t>2025/7/9</a:t>
+              <a:t>2026/2/10</a:t>
             </a:fld>
             <a:endParaRPr kumimoji="1" lang="ja-JP" altLang="en-US"/>
           </a:p>
@@ -2293,7 +2293,7 @@
           <a:p>
             <a:fld id="{E9CC885B-4903-4D54-9A93-00025F12DED9}" type="datetimeFigureOut">
               <a:rPr kumimoji="1" lang="ja-JP" altLang="en-US" smtClean="0"/>
-              <a:t>2025/7/9</a:t>
+              <a:t>2026/2/10</a:t>
             </a:fld>
             <a:endParaRPr kumimoji="1" lang="ja-JP" altLang="en-US"/>
           </a:p>
@@ -2636,7 +2636,7 @@
           <a:p>
             <a:fld id="{E9CC885B-4903-4D54-9A93-00025F12DED9}" type="datetimeFigureOut">
               <a:rPr kumimoji="1" lang="ja-JP" altLang="en-US" smtClean="0"/>
-              <a:t>2025/7/9</a:t>
+              <a:t>2026/2/10</a:t>
             </a:fld>
             <a:endParaRPr kumimoji="1" lang="ja-JP" altLang="en-US"/>
           </a:p>
@@ -2924,7 +2924,7 @@
           <a:p>
             <a:fld id="{E9CC885B-4903-4D54-9A93-00025F12DED9}" type="datetimeFigureOut">
               <a:rPr kumimoji="1" lang="ja-JP" altLang="en-US" smtClean="0"/>
-              <a:t>2025/7/9</a:t>
+              <a:t>2026/2/10</a:t>
             </a:fld>
             <a:endParaRPr kumimoji="1" lang="ja-JP" altLang="en-US"/>
           </a:p>
@@ -3197,7 +3197,7 @@
           <a:p>
             <a:fld id="{E9CC885B-4903-4D54-9A93-00025F12DED9}" type="datetimeFigureOut">
               <a:rPr kumimoji="1" lang="ja-JP" altLang="en-US" smtClean="0"/>
-              <a:t>2025/7/9</a:t>
+              <a:t>2026/2/10</a:t>
             </a:fld>
             <a:endParaRPr kumimoji="1" lang="ja-JP" altLang="en-US"/>
           </a:p>
@@ -3665,7 +3665,7 @@
         <p:spPr>
           <a:xfrm>
             <a:off x="567542" y="1216429"/>
-            <a:ext cx="9725739" cy="2677656"/>
+            <a:ext cx="9725739" cy="1200329"/>
           </a:xfrm>
           <a:prstGeom prst="rect">
             <a:avLst/>
@@ -3721,46 +3721,6 @@
                 <a:srgbClr val="FF0000"/>
               </a:solidFill>
             </a:endParaRPr>
-          </a:p>
-          <a:p>
-            <a:endParaRPr lang="en-US" altLang="ja-JP" sz="2400" dirty="0"/>
-          </a:p>
-          <a:p>
-            <a:endParaRPr kumimoji="1" lang="en-US" altLang="ja-JP" sz="2400" dirty="0"/>
-          </a:p>
-          <a:p>
-            <a:r>
-              <a:rPr lang="en-US" altLang="ja-JP" sz="2400" b="1" dirty="0">
-                <a:solidFill>
-                  <a:srgbClr val="FF0000"/>
-                </a:solidFill>
-              </a:rPr>
-              <a:t>※</a:t>
-            </a:r>
-            <a:r>
-              <a:rPr lang="ja-JP" altLang="en-US" sz="2400" b="1" dirty="0">
-                <a:solidFill>
-                  <a:srgbClr val="FF0000"/>
-                </a:solidFill>
-              </a:rPr>
-              <a:t>注意</a:t>
-            </a:r>
-            <a:endParaRPr lang="en-US" altLang="ja-JP" sz="2400" b="1" dirty="0">
-              <a:solidFill>
-                <a:srgbClr val="FF0000"/>
-              </a:solidFill>
-            </a:endParaRPr>
-          </a:p>
-          <a:p>
-            <a:r>
-              <a:rPr lang="en-US" altLang="ja-JP" sz="2400" dirty="0" err="1"/>
-              <a:t>AIPlayCPU</a:t>
-            </a:r>
-            <a:r>
-              <a:rPr lang="ja-JP" altLang="en-US" sz="2400" dirty="0"/>
-              <a:t>以外には手を入れないこと</a:t>
-            </a:r>
-            <a:endParaRPr lang="en-US" altLang="ja-JP" sz="2400" dirty="0"/>
           </a:p>
         </p:txBody>
       </p:sp>
